--- a/Pregrado/Investigacion en ciencia y tecnologia/Clases/Sesion 05 - Planteamiento del problema · marco teórico y revisión de literatura/Presentacion.pptx
+++ b/Pregrado/Investigacion en ciencia y tecnologia/Clases/Sesion 05 - Planteamiento del problema · marco teórico y revisión de literatura/Presentacion.pptx
@@ -40,6 +40,8 @@
     <p:sldId id="288" r:id="rId39"/>
     <p:sldId id="289" r:id="rId40"/>
     <p:sldId id="290" r:id="rId41"/>
+    <p:sldId id="291" r:id="rId42"/>
+    <p:sldId id="292" r:id="rId43"/>
   </p:sldIdLst>
   <p:sldSz cx="12191695" cy="6858000" type="screen4x3"/>
   <p:notesSz cx="6858000" cy="9144000"/>
@@ -12115,7 +12117,7 @@
                 </a:solidFill>
                 <a:latin typeface="Calibri"/>
               </a:rPr>
-              <a:t>TALLER · Planteamiento + primera página de marco (~24 min)</a:t>
+              <a:t>TALLER · Planteamiento + primera página de marco</a:t>
             </a:r>
           </a:p>
         </p:txBody>
@@ -12128,8 +12130,8 @@
         </p:nvSpPr>
         <p:spPr>
           <a:xfrm>
-            <a:off x="640080" y="1691639"/>
-            <a:ext cx="10911535" cy="4617720"/>
+            <a:off x="640080" y="1280160"/>
+            <a:ext cx="10911535" cy="411480"/>
           </a:xfrm>
           <a:prstGeom prst="rect">
             <a:avLst/>
@@ -12142,6 +12144,41 @@
           </a:bodyPr>
           <a:lstStyle/>
           <a:p>
+            <a:pPr algn="ctr"/>
+            <a:r>
+              <a:rPr sz="1500" b="0" i="0">
+                <a:solidFill>
+                  <a:srgbClr val="2B2B2B"/>
+                </a:solidFill>
+                <a:latin typeface="Calibri"/>
+              </a:rPr>
+              <a:t>Individual · el Docente pasa revisando la alineación entre pregunta, planteamiento y marco</a:t>
+            </a:r>
+          </a:p>
+        </p:txBody>
+      </p:sp>
+      <p:sp>
+        <p:nvSpPr>
+          <p:cNvPr id="5" name="TextBox 4"/>
+          <p:cNvSpPr txBox="1"/>
+          <p:nvPr/>
+        </p:nvSpPr>
+        <p:spPr>
+          <a:xfrm>
+            <a:off x="640080" y="2011679"/>
+            <a:ext cx="10911535" cy="4297680"/>
+          </a:xfrm>
+          <a:prstGeom prst="rect">
+            <a:avLst/>
+          </a:prstGeom>
+          <a:noFill/>
+        </p:spPr>
+        <p:txBody>
+          <a:bodyPr wrap="square" anchor="t" lIns="0" rIns="0" tIns="0" bIns="0">
+            <a:spAutoFit/>
+          </a:bodyPr>
+          <a:lstStyle/>
+          <a:p>
             <a:pPr>
               <a:spcAft>
                 <a:spcPts val="1000"/>
@@ -12163,7 +12200,7 @@
                 </a:solidFill>
                 <a:latin typeface="Calibri"/>
               </a:rPr>
-              <a:t>Consigna literal.</a:t>
+              <a:t>Al final tiene:</a:t>
             </a:r>
             <a:r>
               <a:rPr sz="1600" b="0" i="0">
@@ -12172,420 +12209,7 @@
                 </a:solidFill>
                 <a:latin typeface="Calibri"/>
               </a:rPr>
-              <a:t> En el documento `S05_PlanteamientoMarco_Apellido`:</a:t>
-            </a:r>
-          </a:p>
-          <a:p>
-            <a:pPr lvl="1">
-              <a:spcAft>
-                <a:spcPts val="600"/>
-              </a:spcAft>
-            </a:pPr>
-            <a:r>
-              <a:rPr sz="1500" b="0" i="0">
-                <a:solidFill>
-                  <a:srgbClr val="2B2B2B"/>
-                </a:solidFill>
-                <a:latin typeface="Calibri"/>
-              </a:rPr>
-              <a:t>●   </a:t>
-            </a:r>
-            <a:r>
-              <a:rPr sz="1500" b="1" i="0">
-                <a:solidFill>
-                  <a:srgbClr val="2B2B2B"/>
-                </a:solidFill>
-                <a:latin typeface="Calibri"/>
-              </a:rPr>
-              <a:t>(1)</a:t>
-            </a:r>
-            <a:r>
-              <a:rPr sz="1500" b="0" i="0">
-                <a:solidFill>
-                  <a:srgbClr val="2B2B2B"/>
-                </a:solidFill>
-                <a:latin typeface="Calibri"/>
-              </a:rPr>
-              <a:t> Llene la tabla </a:t>
-            </a:r>
-            <a:r>
-              <a:rPr sz="1500" b="1" i="0">
-                <a:solidFill>
-                  <a:srgbClr val="2B2B2B"/>
-                </a:solidFill>
-                <a:latin typeface="Calibri"/>
-              </a:rPr>
-              <a:t>síntoma / evidencia / consecuencia</a:t>
-            </a:r>
-            <a:r>
-              <a:rPr sz="1500" b="0" i="0">
-                <a:solidFill>
-                  <a:srgbClr val="2B2B2B"/>
-                </a:solidFill>
-                <a:latin typeface="Calibri"/>
-              </a:rPr>
-              <a:t> con </a:t>
-            </a:r>
-            <a:r>
-              <a:rPr sz="1500" b="1" i="0">
-                <a:solidFill>
-                  <a:srgbClr val="2B2B2B"/>
-                </a:solidFill>
-                <a:latin typeface="Calibri"/>
-              </a:rPr>
-              <a:t>al menos tres filas</a:t>
-            </a:r>
-            <a:r>
-              <a:rPr sz="1500" b="0" i="0">
-                <a:solidFill>
-                  <a:srgbClr val="2B2B2B"/>
-                </a:solidFill>
-                <a:latin typeface="Calibri"/>
-              </a:rPr>
-              <a:t>. </a:t>
-            </a:r>
-            <a:r>
-              <a:rPr sz="1500" b="1" i="0">
-                <a:solidFill>
-                  <a:srgbClr val="2B2B2B"/>
-                </a:solidFill>
-                <a:latin typeface="Calibri"/>
-              </a:rPr>
-              <a:t>(5 min)</a:t>
-            </a:r>
-          </a:p>
-          <a:p>
-            <a:pPr lvl="1">
-              <a:spcAft>
-                <a:spcPts val="600"/>
-              </a:spcAft>
-            </a:pPr>
-            <a:r>
-              <a:rPr sz="1500" b="0" i="0">
-                <a:solidFill>
-                  <a:srgbClr val="2B2B2B"/>
-                </a:solidFill>
-                <a:latin typeface="Calibri"/>
-              </a:rPr>
-              <a:t>●   </a:t>
-            </a:r>
-            <a:r>
-              <a:rPr sz="1500" b="1" i="0">
-                <a:solidFill>
-                  <a:srgbClr val="2B2B2B"/>
-                </a:solidFill>
-                <a:latin typeface="Calibri"/>
-              </a:rPr>
-              <a:t>(2)</a:t>
-            </a:r>
-            <a:r>
-              <a:rPr sz="1500" b="0" i="0">
-                <a:solidFill>
-                  <a:srgbClr val="2B2B2B"/>
-                </a:solidFill>
-                <a:latin typeface="Calibri"/>
-              </a:rPr>
-              <a:t> Conviértala en un planteamiento de </a:t>
-            </a:r>
-            <a:r>
-              <a:rPr sz="1500" b="1" i="0">
-                <a:solidFill>
-                  <a:srgbClr val="2B2B2B"/>
-                </a:solidFill>
-                <a:latin typeface="Calibri"/>
-              </a:rPr>
-              <a:t>1 a 1.5 páginas</a:t>
-            </a:r>
-            <a:r>
-              <a:rPr sz="1500" b="0" i="0">
-                <a:solidFill>
-                  <a:srgbClr val="2B2B2B"/>
-                </a:solidFill>
-                <a:latin typeface="Calibri"/>
-              </a:rPr>
-              <a:t> con los </a:t>
-            </a:r>
-            <a:r>
-              <a:rPr sz="1500" b="1" i="0">
-                <a:solidFill>
-                  <a:srgbClr val="2B2B2B"/>
-                </a:solidFill>
-                <a:latin typeface="Calibri"/>
-              </a:rPr>
-              <a:t>seis componentes</a:t>
-            </a:r>
-            <a:r>
-              <a:rPr sz="1500" b="0" i="0">
-                <a:solidFill>
-                  <a:srgbClr val="2B2B2B"/>
-                </a:solidFill>
-                <a:latin typeface="Calibri"/>
-              </a:rPr>
-              <a:t> en orden, que </a:t>
-            </a:r>
-            <a:r>
-              <a:rPr sz="1500" b="1" i="0">
-                <a:solidFill>
-                  <a:srgbClr val="2B2B2B"/>
-                </a:solidFill>
-                <a:latin typeface="Calibri"/>
-              </a:rPr>
-              <a:t>termine en su pregunta</a:t>
-            </a:r>
-            <a:r>
-              <a:rPr sz="1500" b="0" i="0">
-                <a:solidFill>
-                  <a:srgbClr val="2B2B2B"/>
-                </a:solidFill>
-                <a:latin typeface="Calibri"/>
-              </a:rPr>
-              <a:t>. </a:t>
-            </a:r>
-            <a:r>
-              <a:rPr sz="1500" b="1" i="0">
-                <a:solidFill>
-                  <a:srgbClr val="2B2B2B"/>
-                </a:solidFill>
-                <a:latin typeface="Calibri"/>
-              </a:rPr>
-              <a:t>(9 min)</a:t>
-            </a:r>
-          </a:p>
-          <a:p>
-            <a:pPr lvl="1">
-              <a:spcAft>
-                <a:spcPts val="600"/>
-              </a:spcAft>
-            </a:pPr>
-            <a:r>
-              <a:rPr sz="1500" b="0" i="0">
-                <a:solidFill>
-                  <a:srgbClr val="2B2B2B"/>
-                </a:solidFill>
-                <a:latin typeface="Calibri"/>
-              </a:rPr>
-              <a:t>●   </a:t>
-            </a:r>
-            <a:r>
-              <a:rPr sz="1500" b="1" i="0">
-                <a:solidFill>
-                  <a:srgbClr val="2B2B2B"/>
-                </a:solidFill>
-                <a:latin typeface="Calibri"/>
-              </a:rPr>
-              <a:t>(3)</a:t>
-            </a:r>
-            <a:r>
-              <a:rPr sz="1500" b="0" i="0">
-                <a:solidFill>
-                  <a:srgbClr val="2B2B2B"/>
-                </a:solidFill>
-                <a:latin typeface="Calibri"/>
-              </a:rPr>
-              <a:t> Declare sus </a:t>
-            </a:r>
-            <a:r>
-              <a:rPr sz="1500" b="1" i="0">
-                <a:solidFill>
-                  <a:srgbClr val="2B2B2B"/>
-                </a:solidFill>
-                <a:latin typeface="Calibri"/>
-              </a:rPr>
-              <a:t>2 constructos</a:t>
-            </a:r>
-            <a:r>
-              <a:rPr sz="1500" b="0" i="0">
-                <a:solidFill>
-                  <a:srgbClr val="2B2B2B"/>
-                </a:solidFill>
-                <a:latin typeface="Calibri"/>
-              </a:rPr>
-              <a:t> y ponga un </a:t>
-            </a:r>
-            <a:r>
-              <a:rPr sz="1500" b="1" i="0">
-                <a:solidFill>
-                  <a:srgbClr val="2B2B2B"/>
-                </a:solidFill>
-                <a:latin typeface="Calibri"/>
-              </a:rPr>
-              <a:t>subtítulo</a:t>
-            </a:r>
-            <a:r>
-              <a:rPr sz="1500" b="0" i="0">
-                <a:solidFill>
-                  <a:srgbClr val="2B2B2B"/>
-                </a:solidFill>
-                <a:latin typeface="Calibri"/>
-              </a:rPr>
-              <a:t> para cada uno. </a:t>
-            </a:r>
-            <a:r>
-              <a:rPr sz="1500" b="1" i="0">
-                <a:solidFill>
-                  <a:srgbClr val="2B2B2B"/>
-                </a:solidFill>
-                <a:latin typeface="Calibri"/>
-              </a:rPr>
-              <a:t>(2 min)</a:t>
-            </a:r>
-          </a:p>
-          <a:p>
-            <a:pPr lvl="1">
-              <a:spcAft>
-                <a:spcPts val="600"/>
-              </a:spcAft>
-            </a:pPr>
-            <a:r>
-              <a:rPr sz="1500" b="0" i="0">
-                <a:solidFill>
-                  <a:srgbClr val="2B2B2B"/>
-                </a:solidFill>
-                <a:latin typeface="Calibri"/>
-              </a:rPr>
-              <a:t>●   </a:t>
-            </a:r>
-            <a:r>
-              <a:rPr sz="1500" b="1" i="0">
-                <a:solidFill>
-                  <a:srgbClr val="2B2B2B"/>
-                </a:solidFill>
-                <a:latin typeface="Calibri"/>
-              </a:rPr>
-              <a:t>(4)</a:t>
-            </a:r>
-            <a:r>
-              <a:rPr sz="1500" b="0" i="0">
-                <a:solidFill>
-                  <a:srgbClr val="2B2B2B"/>
-                </a:solidFill>
-                <a:latin typeface="Calibri"/>
-              </a:rPr>
-              <a:t> Complete </a:t>
-            </a:r>
-            <a:r>
-              <a:rPr sz="1500" b="1" i="0">
-                <a:solidFill>
-                  <a:srgbClr val="2B2B2B"/>
-                </a:solidFill>
-                <a:latin typeface="Calibri"/>
-              </a:rPr>
-              <a:t>5 fuentes</a:t>
-            </a:r>
-            <a:r>
-              <a:rPr sz="1500" b="0" i="0">
-                <a:solidFill>
-                  <a:srgbClr val="2B2B2B"/>
-                </a:solidFill>
-                <a:latin typeface="Calibri"/>
-              </a:rPr>
-              <a:t> con su </a:t>
-            </a:r>
-            <a:r>
-              <a:rPr sz="1500" b="1" i="0">
-                <a:solidFill>
-                  <a:srgbClr val="2B2B2B"/>
-                </a:solidFill>
-                <a:latin typeface="Calibri"/>
-              </a:rPr>
-              <a:t>ficha de lectura</a:t>
-            </a:r>
-            <a:r>
-              <a:rPr sz="1500" b="0" i="0">
-                <a:solidFill>
-                  <a:srgbClr val="2B2B2B"/>
-                </a:solidFill>
-                <a:latin typeface="Calibri"/>
-              </a:rPr>
-              <a:t> (los cinco campos), citadas en APA 7. </a:t>
-            </a:r>
-            <a:r>
-              <a:rPr sz="1500" b="1" i="0">
-                <a:solidFill>
-                  <a:srgbClr val="2B2B2B"/>
-                </a:solidFill>
-                <a:latin typeface="Calibri"/>
-              </a:rPr>
-              <a:t>(4 min)</a:t>
-            </a:r>
-          </a:p>
-          <a:p>
-            <a:pPr lvl="1">
-              <a:spcAft>
-                <a:spcPts val="600"/>
-              </a:spcAft>
-            </a:pPr>
-            <a:r>
-              <a:rPr sz="1500" b="0" i="0">
-                <a:solidFill>
-                  <a:srgbClr val="2B2B2B"/>
-                </a:solidFill>
-                <a:latin typeface="Calibri"/>
-              </a:rPr>
-              <a:t>●   </a:t>
-            </a:r>
-            <a:r>
-              <a:rPr sz="1500" b="1" i="0">
-                <a:solidFill>
-                  <a:srgbClr val="2B2B2B"/>
-                </a:solidFill>
-                <a:latin typeface="Calibri"/>
-              </a:rPr>
-              <a:t>(5)</a:t>
-            </a:r>
-            <a:r>
-              <a:rPr sz="1500" b="0" i="0">
-                <a:solidFill>
-                  <a:srgbClr val="2B2B2B"/>
-                </a:solidFill>
-                <a:latin typeface="Calibri"/>
-              </a:rPr>
-              <a:t> Escriba </a:t>
-            </a:r>
-            <a:r>
-              <a:rPr sz="1500" b="1" i="0">
-                <a:solidFill>
-                  <a:srgbClr val="2B2B2B"/>
-                </a:solidFill>
-                <a:latin typeface="Calibri"/>
-              </a:rPr>
-              <a:t>un párrafo de marco</a:t>
-            </a:r>
-            <a:r>
-              <a:rPr sz="1500" b="0" i="0">
-                <a:solidFill>
-                  <a:srgbClr val="2B2B2B"/>
-                </a:solidFill>
-                <a:latin typeface="Calibri"/>
-              </a:rPr>
-              <a:t> por constructo con los </a:t>
-            </a:r>
-            <a:r>
-              <a:rPr sz="1500" b="1" i="0">
-                <a:solidFill>
-                  <a:srgbClr val="2B2B2B"/>
-                </a:solidFill>
-                <a:latin typeface="Calibri"/>
-              </a:rPr>
-              <a:t>cuatro movimientos</a:t>
-            </a:r>
-            <a:r>
-              <a:rPr sz="1500" b="0" i="0">
-                <a:solidFill>
-                  <a:srgbClr val="2B2B2B"/>
-                </a:solidFill>
-                <a:latin typeface="Calibri"/>
-              </a:rPr>
-              <a:t>, y cierre cada uno volviendo a su caso. </a:t>
-            </a:r>
-            <a:r>
-              <a:rPr sz="1500" b="1" i="0">
-                <a:solidFill>
-                  <a:srgbClr val="2B2B2B"/>
-                </a:solidFill>
-                <a:latin typeface="Calibri"/>
-              </a:rPr>
-              <a:t>(4 min)</a:t>
+              <a:t> el planteamiento de 1 a 1.5 páginas, sus 2 constructos, 5 fichas de lectura y un párrafo de marco por constructo.</a:t>
             </a:r>
           </a:p>
           <a:p>
@@ -12610,7 +12234,7 @@
                 </a:solidFill>
                 <a:latin typeface="Calibri"/>
               </a:rPr>
-              <a:t>El Docente pasa acompañando y revisando alineación</a:t>
+              <a:t>Paso 1</a:t>
             </a:r>
             <a:r>
               <a:rPr sz="1600" b="0" i="0">
@@ -12619,7 +12243,43 @@
                 </a:solidFill>
                 <a:latin typeface="Calibri"/>
               </a:rPr>
-              <a:t> entre pregunta, planteamiento y marco.</a:t>
+              <a:t> · Llene la tabla </a:t>
+            </a:r>
+            <a:r>
+              <a:rPr sz="1600" b="1" i="0">
+                <a:solidFill>
+                  <a:srgbClr val="2B2B2B"/>
+                </a:solidFill>
+                <a:latin typeface="Calibri"/>
+              </a:rPr>
+              <a:t>síntoma / evidencia / consecuencia</a:t>
+            </a:r>
+            <a:r>
+              <a:rPr sz="1600" b="0" i="0">
+                <a:solidFill>
+                  <a:srgbClr val="2B2B2B"/>
+                </a:solidFill>
+                <a:latin typeface="Calibri"/>
+              </a:rPr>
+              <a:t> con </a:t>
+            </a:r>
+            <a:r>
+              <a:rPr sz="1600" b="1" i="0">
+                <a:solidFill>
+                  <a:srgbClr val="2B2B2B"/>
+                </a:solidFill>
+                <a:latin typeface="Calibri"/>
+              </a:rPr>
+              <a:t>al menos tres filas</a:t>
+            </a:r>
+            <a:r>
+              <a:rPr sz="1600" b="0" i="0">
+                <a:solidFill>
+                  <a:srgbClr val="2B2B2B"/>
+                </a:solidFill>
+                <a:latin typeface="Calibri"/>
+              </a:rPr>
+              <a:t>.</a:t>
             </a:r>
           </a:p>
           <a:p>
@@ -12644,7 +12304,7 @@
                 </a:solidFill>
                 <a:latin typeface="Calibri"/>
               </a:rPr>
-              <a:t>Criterio de éxito (verificable):</a:t>
+              <a:t>Paso 2</a:t>
             </a:r>
             <a:r>
               <a:rPr sz="1600" b="0" i="0">
@@ -12653,7 +12313,7 @@
                 </a:solidFill>
                 <a:latin typeface="Calibri"/>
               </a:rPr>
-              <a:t> al leer su planteamiento </a:t>
+              <a:t> · Conviértala en un planteamiento de </a:t>
             </a:r>
             <a:r>
               <a:rPr sz="1600" b="1" i="0">
@@ -12662,7 +12322,7 @@
                 </a:solidFill>
                 <a:latin typeface="Calibri"/>
               </a:rPr>
-              <a:t>sin conocer su tema</a:t>
+              <a:t>1 a 1.5 páginas</a:t>
             </a:r>
             <a:r>
               <a:rPr sz="1600" b="0" i="0">
@@ -12671,7 +12331,7 @@
                 </a:solidFill>
                 <a:latin typeface="Calibri"/>
               </a:rPr>
-              <a:t> se entiende </a:t>
+              <a:t> con los </a:t>
             </a:r>
             <a:r>
               <a:rPr sz="1600" b="1" i="0">
@@ -12680,7 +12340,7 @@
                 </a:solidFill>
                 <a:latin typeface="Calibri"/>
               </a:rPr>
-              <a:t>qué pasa, cómo lo sabe y por qué importa</a:t>
+              <a:t>seis componentes</a:t>
             </a:r>
             <a:r>
               <a:rPr sz="1600" b="0" i="0">
@@ -12689,7 +12349,7 @@
                 </a:solidFill>
                 <a:latin typeface="Calibri"/>
               </a:rPr>
-              <a:t>; y cada párrafo del marco </a:t>
+              <a:t> en orden, que </a:t>
             </a:r>
             <a:r>
               <a:rPr sz="1600" b="1" i="0">
@@ -12698,7 +12358,7 @@
                 </a:solidFill>
                 <a:latin typeface="Calibri"/>
               </a:rPr>
-              <a:t>se puede etiquetar con un constructo</a:t>
+              <a:t>termine en su pregunta</a:t>
             </a:r>
             <a:r>
               <a:rPr sz="1600" b="0" i="0">
@@ -12723,7 +12383,7 @@
                 </a:solidFill>
                 <a:latin typeface="Calibri"/>
               </a:rPr>
-              <a:t>–   Prueba de control rápida: cuente cuántas veces aparece un </a:t>
+              <a:t>–   </a:t>
             </a:r>
             <a:r>
               <a:rPr sz="1600" b="1" i="0">
@@ -12732,7 +12392,7 @@
                 </a:solidFill>
                 <a:latin typeface="Calibri"/>
               </a:rPr>
-              <a:t>número o una cita</a:t>
+              <a:t>Paso 3</a:t>
             </a:r>
             <a:r>
               <a:rPr sz="1600" b="0" i="0">
@@ -12741,14 +12401,242 @@
                 </a:solidFill>
                 <a:latin typeface="Calibri"/>
               </a:rPr>
-              <a:t> en su texto. Si la respuesta es cero, todavía es opinión.</a:t>
-            </a:r>
-          </a:p>
-        </p:txBody>
-      </p:sp>
-      <p:sp>
-        <p:nvSpPr>
-          <p:cNvPr id="5" name="TextBox 4"/>
+              <a:t> · Declare sus </a:t>
+            </a:r>
+            <a:r>
+              <a:rPr sz="1600" b="1" i="0">
+                <a:solidFill>
+                  <a:srgbClr val="2B2B2B"/>
+                </a:solidFill>
+                <a:latin typeface="Calibri"/>
+              </a:rPr>
+              <a:t>2 constructos</a:t>
+            </a:r>
+            <a:r>
+              <a:rPr sz="1600" b="0" i="0">
+                <a:solidFill>
+                  <a:srgbClr val="2B2B2B"/>
+                </a:solidFill>
+                <a:latin typeface="Calibri"/>
+              </a:rPr>
+              <a:t> y ponga un </a:t>
+            </a:r>
+            <a:r>
+              <a:rPr sz="1600" b="1" i="0">
+                <a:solidFill>
+                  <a:srgbClr val="2B2B2B"/>
+                </a:solidFill>
+                <a:latin typeface="Calibri"/>
+              </a:rPr>
+              <a:t>subtítulo</a:t>
+            </a:r>
+            <a:r>
+              <a:rPr sz="1600" b="0" i="0">
+                <a:solidFill>
+                  <a:srgbClr val="2B2B2B"/>
+                </a:solidFill>
+                <a:latin typeface="Calibri"/>
+              </a:rPr>
+              <a:t> para cada uno.</a:t>
+            </a:r>
+          </a:p>
+          <a:p>
+            <a:pPr>
+              <a:spcAft>
+                <a:spcPts val="1000"/>
+              </a:spcAft>
+            </a:pPr>
+            <a:r>
+              <a:rPr sz="1600" b="0" i="0">
+                <a:solidFill>
+                  <a:srgbClr val="2B2B2B"/>
+                </a:solidFill>
+                <a:latin typeface="Calibri"/>
+              </a:rPr>
+              <a:t>–   </a:t>
+            </a:r>
+            <a:r>
+              <a:rPr sz="1600" b="1" i="0">
+                <a:solidFill>
+                  <a:srgbClr val="2B2B2B"/>
+                </a:solidFill>
+                <a:latin typeface="Calibri"/>
+              </a:rPr>
+              <a:t>Paso 4</a:t>
+            </a:r>
+            <a:r>
+              <a:rPr sz="1600" b="0" i="0">
+                <a:solidFill>
+                  <a:srgbClr val="2B2B2B"/>
+                </a:solidFill>
+                <a:latin typeface="Calibri"/>
+              </a:rPr>
+              <a:t> · Complete </a:t>
+            </a:r>
+            <a:r>
+              <a:rPr sz="1600" b="1" i="0">
+                <a:solidFill>
+                  <a:srgbClr val="2B2B2B"/>
+                </a:solidFill>
+                <a:latin typeface="Calibri"/>
+              </a:rPr>
+              <a:t>5 fuentes</a:t>
+            </a:r>
+            <a:r>
+              <a:rPr sz="1600" b="0" i="0">
+                <a:solidFill>
+                  <a:srgbClr val="2B2B2B"/>
+                </a:solidFill>
+                <a:latin typeface="Calibri"/>
+              </a:rPr>
+              <a:t> con su </a:t>
+            </a:r>
+            <a:r>
+              <a:rPr sz="1600" b="1" i="0">
+                <a:solidFill>
+                  <a:srgbClr val="2B2B2B"/>
+                </a:solidFill>
+                <a:latin typeface="Calibri"/>
+              </a:rPr>
+              <a:t>ficha de lectura</a:t>
+            </a:r>
+            <a:r>
+              <a:rPr sz="1600" b="0" i="0">
+                <a:solidFill>
+                  <a:srgbClr val="2B2B2B"/>
+                </a:solidFill>
+                <a:latin typeface="Calibri"/>
+              </a:rPr>
+              <a:t> —los cinco campos—, citadas en APA 7.</a:t>
+            </a:r>
+          </a:p>
+          <a:p>
+            <a:pPr>
+              <a:spcAft>
+                <a:spcPts val="1000"/>
+              </a:spcAft>
+            </a:pPr>
+            <a:r>
+              <a:rPr sz="1600" b="0" i="0">
+                <a:solidFill>
+                  <a:srgbClr val="2B2B2B"/>
+                </a:solidFill>
+                <a:latin typeface="Calibri"/>
+              </a:rPr>
+              <a:t>–   </a:t>
+            </a:r>
+            <a:r>
+              <a:rPr sz="1600" b="1" i="0">
+                <a:solidFill>
+                  <a:srgbClr val="2B2B2B"/>
+                </a:solidFill>
+                <a:latin typeface="Calibri"/>
+              </a:rPr>
+              <a:t>Paso 5</a:t>
+            </a:r>
+            <a:r>
+              <a:rPr sz="1600" b="0" i="0">
+                <a:solidFill>
+                  <a:srgbClr val="2B2B2B"/>
+                </a:solidFill>
+                <a:latin typeface="Calibri"/>
+              </a:rPr>
+              <a:t> · Escriba </a:t>
+            </a:r>
+            <a:r>
+              <a:rPr sz="1600" b="1" i="0">
+                <a:solidFill>
+                  <a:srgbClr val="2B2B2B"/>
+                </a:solidFill>
+                <a:latin typeface="Calibri"/>
+              </a:rPr>
+              <a:t>un párrafo de marco</a:t>
+            </a:r>
+            <a:r>
+              <a:rPr sz="1600" b="0" i="0">
+                <a:solidFill>
+                  <a:srgbClr val="2B2B2B"/>
+                </a:solidFill>
+                <a:latin typeface="Calibri"/>
+              </a:rPr>
+              <a:t> por constructo con los </a:t>
+            </a:r>
+            <a:r>
+              <a:rPr sz="1600" b="1" i="0">
+                <a:solidFill>
+                  <a:srgbClr val="2B2B2B"/>
+                </a:solidFill>
+                <a:latin typeface="Calibri"/>
+              </a:rPr>
+              <a:t>cuatro movimientos</a:t>
+            </a:r>
+            <a:r>
+              <a:rPr sz="1600" b="0" i="0">
+                <a:solidFill>
+                  <a:srgbClr val="2B2B2B"/>
+                </a:solidFill>
+                <a:latin typeface="Calibri"/>
+              </a:rPr>
+              <a:t>, y cierre cada uno volviendo a su caso.</a:t>
+            </a:r>
+          </a:p>
+          <a:p>
+            <a:pPr>
+              <a:spcAft>
+                <a:spcPts val="1000"/>
+              </a:spcAft>
+            </a:pPr>
+            <a:r>
+              <a:rPr sz="1600" b="0" i="0">
+                <a:solidFill>
+                  <a:srgbClr val="2B2B2B"/>
+                </a:solidFill>
+                <a:latin typeface="Calibri"/>
+              </a:rPr>
+              <a:t>–   </a:t>
+            </a:r>
+            <a:r>
+              <a:rPr sz="1600" b="1" i="0">
+                <a:solidFill>
+                  <a:srgbClr val="2B2B2B"/>
+                </a:solidFill>
+                <a:latin typeface="Calibri"/>
+              </a:rPr>
+              <a:t>En clase, sin falta:</a:t>
+            </a:r>
+            <a:r>
+              <a:rPr sz="1600" b="0" i="0">
+                <a:solidFill>
+                  <a:srgbClr val="2B2B2B"/>
+                </a:solidFill>
+                <a:latin typeface="Calibri"/>
+              </a:rPr>
+              <a:t> los </a:t>
+            </a:r>
+            <a:r>
+              <a:rPr sz="1600" b="1" i="0">
+                <a:solidFill>
+                  <a:srgbClr val="2B2B2B"/>
+                </a:solidFill>
+                <a:latin typeface="Calibri"/>
+              </a:rPr>
+              <a:t>pasos 1 a 2</a:t>
+            </a:r>
+            <a:r>
+              <a:rPr sz="1600" b="0" i="0">
+                <a:solidFill>
+                  <a:srgbClr val="2B2B2B"/>
+                </a:solidFill>
+                <a:latin typeface="Calibri"/>
+              </a:rPr>
+              <a:t>. Del 3 en adelante puede quedar en trabajo autónomo, pero antes de la próxima sesión.</a:t>
+            </a:r>
+          </a:p>
+        </p:txBody>
+      </p:sp>
+      <p:sp>
+        <p:nvSpPr>
+          <p:cNvPr id="6" name="TextBox 5"/>
           <p:cNvSpPr txBox="1"/>
           <p:nvPr/>
         </p:nvSpPr>
@@ -12777,58 +12665,6 @@
                 <a:latin typeface="Calibri"/>
               </a:rPr>
               <a:t>30</a:t>
-            </a:r>
-          </a:p>
-        </p:txBody>
-      </p:sp>
-      <p:sp>
-        <p:nvSpPr>
-          <p:cNvPr id="6" name="TextBox 5"/>
-          <p:cNvSpPr txBox="1"/>
-          <p:nvPr/>
-        </p:nvSpPr>
-        <p:spPr>
-          <a:xfrm>
-            <a:off x="640080" y="5943600"/>
-            <a:ext cx="9997135" cy="457200"/>
-          </a:xfrm>
-          <a:prstGeom prst="rect">
-            <a:avLst/>
-          </a:prstGeom>
-          <a:noFill/>
-        </p:spPr>
-        <p:txBody>
-          <a:bodyPr wrap="square" anchor="t" lIns="0" rIns="0" tIns="0" bIns="0">
-            <a:spAutoFit/>
-          </a:bodyPr>
-          <a:lstStyle/>
-          <a:p>
-            <a:r>
-              <a:rPr sz="1200" b="0" i="1">
-                <a:solidFill>
-                  <a:srgbClr val="2B2B2B"/>
-                </a:solidFill>
-                <a:latin typeface="Calibri"/>
-              </a:rPr>
-              <a:t>Si el tiempo aprieta, priorice el planteamiento completo y </a:t>
-            </a:r>
-            <a:r>
-              <a:rPr sz="1200" b="1" i="1">
-                <a:solidFill>
-                  <a:srgbClr val="2B2B2B"/>
-                </a:solidFill>
-                <a:latin typeface="Calibri"/>
-              </a:rPr>
-              <a:t>un</a:t>
-            </a:r>
-            <a:r>
-              <a:rPr sz="1200" b="0" i="1">
-                <a:solidFill>
-                  <a:srgbClr val="2B2B2B"/>
-                </a:solidFill>
-                <a:latin typeface="Calibri"/>
-              </a:rPr>
-              <a:t> párrafo de marco bien hecho. Media página con argumento vale más que dos páginas de definiciones.</a:t>
             </a:r>
           </a:p>
         </p:txBody>
@@ -12933,7 +12769,7 @@
                 </a:solidFill>
                 <a:latin typeface="Calibri"/>
               </a:rPr>
-              <a:t>Checklist antes de subir su entrega</a:t>
+              <a:t>TALLER · cómo se revisa y dónde se entrega</a:t>
             </a:r>
           </a:p>
         </p:txBody>
@@ -12946,8 +12782,8 @@
         </p:nvSpPr>
         <p:spPr>
           <a:xfrm>
-            <a:off x="640080" y="1691639"/>
-            <a:ext cx="10911535" cy="4617720"/>
+            <a:off x="640080" y="1280160"/>
+            <a:ext cx="10911535" cy="411480"/>
           </a:xfrm>
           <a:prstGeom prst="rect">
             <a:avLst/>
@@ -12960,6 +12796,41 @@
           </a:bodyPr>
           <a:lstStyle/>
           <a:p>
+            <a:pPr algn="ctr"/>
+            <a:r>
+              <a:rPr sz="1500" b="0" i="0">
+                <a:solidFill>
+                  <a:srgbClr val="2B2B2B"/>
+                </a:solidFill>
+                <a:latin typeface="Calibri"/>
+              </a:rPr>
+              <a:t>Planteamiento + primera página de marco</a:t>
+            </a:r>
+          </a:p>
+        </p:txBody>
+      </p:sp>
+      <p:sp>
+        <p:nvSpPr>
+          <p:cNvPr id="5" name="TextBox 4"/>
+          <p:cNvSpPr txBox="1"/>
+          <p:nvPr/>
+        </p:nvSpPr>
+        <p:spPr>
+          <a:xfrm>
+            <a:off x="640080" y="2011679"/>
+            <a:ext cx="10911535" cy="4297680"/>
+          </a:xfrm>
+          <a:prstGeom prst="rect">
+            <a:avLst/>
+          </a:prstGeom>
+          <a:noFill/>
+        </p:spPr>
+        <p:txBody>
+          <a:bodyPr wrap="square" anchor="t" lIns="0" rIns="0" tIns="0" bIns="0">
+            <a:spAutoFit/>
+          </a:bodyPr>
+          <a:lstStyle/>
+          <a:p>
             <a:pPr>
               <a:spcAft>
                 <a:spcPts val="1000"/>
@@ -12972,7 +12843,145 @@
                 </a:solidFill>
                 <a:latin typeface="Calibri"/>
               </a:rPr>
-              <a:t>–   [ ] El documento se llama `S05_PlanteamientoMarco_Apellido`.</a:t>
+              <a:t>–   </a:t>
+            </a:r>
+            <a:r>
+              <a:rPr sz="1600" b="1" i="0">
+                <a:solidFill>
+                  <a:srgbClr val="2B2B2B"/>
+                </a:solidFill>
+                <a:latin typeface="Calibri"/>
+              </a:rPr>
+              <a:t>Quedó bien si</a:t>
+            </a:r>
+            <a:r>
+              <a:rPr sz="1600" b="0" i="0">
+                <a:solidFill>
+                  <a:srgbClr val="2B2B2B"/>
+                </a:solidFill>
+                <a:latin typeface="Calibri"/>
+              </a:rPr>
+              <a:t> —compruébelo usted antes de cerrar el documento—:</a:t>
+            </a:r>
+          </a:p>
+          <a:p>
+            <a:pPr lvl="1">
+              <a:spcAft>
+                <a:spcPts val="600"/>
+              </a:spcAft>
+            </a:pPr>
+            <a:r>
+              <a:rPr sz="1500" b="0" i="0">
+                <a:solidFill>
+                  <a:srgbClr val="2B2B2B"/>
+                </a:solidFill>
+                <a:latin typeface="Calibri"/>
+              </a:rPr>
+              <a:t>●   Al leer su planteamiento </a:t>
+            </a:r>
+            <a:r>
+              <a:rPr sz="1500" b="1" i="0">
+                <a:solidFill>
+                  <a:srgbClr val="2B2B2B"/>
+                </a:solidFill>
+                <a:latin typeface="Calibri"/>
+              </a:rPr>
+              <a:t>sin conocer su tema</a:t>
+            </a:r>
+            <a:r>
+              <a:rPr sz="1500" b="0" i="0">
+                <a:solidFill>
+                  <a:srgbClr val="2B2B2B"/>
+                </a:solidFill>
+                <a:latin typeface="Calibri"/>
+              </a:rPr>
+              <a:t> se entiende </a:t>
+            </a:r>
+            <a:r>
+              <a:rPr sz="1500" b="1" i="0">
+                <a:solidFill>
+                  <a:srgbClr val="2B2B2B"/>
+                </a:solidFill>
+                <a:latin typeface="Calibri"/>
+              </a:rPr>
+              <a:t>qué pasa, cómo lo sabe y por qué importa</a:t>
+            </a:r>
+            <a:r>
+              <a:rPr sz="1500" b="0" i="0">
+                <a:solidFill>
+                  <a:srgbClr val="2B2B2B"/>
+                </a:solidFill>
+                <a:latin typeface="Calibri"/>
+              </a:rPr>
+              <a:t>.</a:t>
+            </a:r>
+          </a:p>
+          <a:p>
+            <a:pPr lvl="1">
+              <a:spcAft>
+                <a:spcPts val="600"/>
+              </a:spcAft>
+            </a:pPr>
+            <a:r>
+              <a:rPr sz="1500" b="0" i="0">
+                <a:solidFill>
+                  <a:srgbClr val="2B2B2B"/>
+                </a:solidFill>
+                <a:latin typeface="Calibri"/>
+              </a:rPr>
+              <a:t>●   Cada párrafo del marco </a:t>
+            </a:r>
+            <a:r>
+              <a:rPr sz="1500" b="1" i="0">
+                <a:solidFill>
+                  <a:srgbClr val="2B2B2B"/>
+                </a:solidFill>
+                <a:latin typeface="Calibri"/>
+              </a:rPr>
+              <a:t>se puede etiquetar</a:t>
+            </a:r>
+            <a:r>
+              <a:rPr sz="1500" b="0" i="0">
+                <a:solidFill>
+                  <a:srgbClr val="2B2B2B"/>
+                </a:solidFill>
+                <a:latin typeface="Calibri"/>
+              </a:rPr>
+              <a:t> con uno de sus constructos.</a:t>
+            </a:r>
+          </a:p>
+          <a:p>
+            <a:pPr lvl="1">
+              <a:spcAft>
+                <a:spcPts val="600"/>
+              </a:spcAft>
+            </a:pPr>
+            <a:r>
+              <a:rPr sz="1500" b="0" i="0">
+                <a:solidFill>
+                  <a:srgbClr val="2B2B2B"/>
+                </a:solidFill>
+                <a:latin typeface="Calibri"/>
+              </a:rPr>
+              <a:t>●   Cuente cuántas veces aparece </a:t>
+            </a:r>
+            <a:r>
+              <a:rPr sz="1500" b="1" i="0">
+                <a:solidFill>
+                  <a:srgbClr val="2B2B2B"/>
+                </a:solidFill>
+                <a:latin typeface="Calibri"/>
+              </a:rPr>
+              <a:t>un número o una cita</a:t>
+            </a:r>
+            <a:r>
+              <a:rPr sz="1500" b="0" i="0">
+                <a:solidFill>
+                  <a:srgbClr val="2B2B2B"/>
+                </a:solidFill>
+                <a:latin typeface="Calibri"/>
+              </a:rPr>
+              <a:t> en su texto: si la respuesta es cero, todavía es opinión.</a:t>
             </a:r>
           </a:p>
           <a:p>
@@ -12988,7 +12997,7 @@
                 </a:solidFill>
                 <a:latin typeface="Calibri"/>
               </a:rPr>
-              <a:t>–   [ ] Están los </a:t>
+              <a:t>–   </a:t>
             </a:r>
             <a:r>
               <a:rPr sz="1600" b="1" i="0">
@@ -12997,7 +13006,7 @@
                 </a:solidFill>
                 <a:latin typeface="Calibri"/>
               </a:rPr>
-              <a:t>seis componentes</a:t>
+              <a:t>Plan B:</a:t>
             </a:r>
             <a:r>
               <a:rPr sz="1600" b="0" i="0">
@@ -13006,7 +13015,7 @@
                 </a:solidFill>
                 <a:latin typeface="Calibri"/>
               </a:rPr>
-              <a:t> del planteamiento, </a:t>
+              <a:t> Si el tiempo aprieta, priorice el planteamiento completo y </a:t>
             </a:r>
             <a:r>
               <a:rPr sz="1600" b="1" i="0">
@@ -13015,7 +13024,7 @@
                 </a:solidFill>
                 <a:latin typeface="Calibri"/>
               </a:rPr>
-              <a:t>en orden</a:t>
+              <a:t>un</a:t>
             </a:r>
             <a:r>
               <a:rPr sz="1600" b="0" i="0">
@@ -13024,25 +13033,7 @@
                 </a:solidFill>
                 <a:latin typeface="Calibri"/>
               </a:rPr>
-              <a:t>, y está escrito en </a:t>
-            </a:r>
-            <a:r>
-              <a:rPr sz="1600" b="1" i="0">
-                <a:solidFill>
-                  <a:srgbClr val="2B2B2B"/>
-                </a:solidFill>
-                <a:latin typeface="Calibri"/>
-              </a:rPr>
-              <a:t>prosa</a:t>
-            </a:r>
-            <a:r>
-              <a:rPr sz="1600" b="0" i="0">
-                <a:solidFill>
-                  <a:srgbClr val="2B2B2B"/>
-                </a:solidFill>
-                <a:latin typeface="Calibri"/>
-              </a:rPr>
-              <a:t> (1 a 1.5 páginas).</a:t>
+              <a:t> párrafo de marco bien hecho. Media página con argumento vale más que dos páginas de definiciones.</a:t>
             </a:r>
           </a:p>
           <a:p>
@@ -13058,7 +13049,7 @@
                 </a:solidFill>
                 <a:latin typeface="Calibri"/>
               </a:rPr>
-              <a:t>–   [ ] Tiene </a:t>
+              <a:t>–   </a:t>
             </a:r>
             <a:r>
               <a:rPr sz="1600" b="1" i="0">
@@ -13067,7 +13058,7 @@
                 </a:solidFill>
                 <a:latin typeface="Calibri"/>
               </a:rPr>
-              <a:t>al menos un dato con fuente citada</a:t>
+              <a:t>Entrega:</a:t>
             </a:r>
             <a:r>
               <a:rPr sz="1600" b="0" i="0">
@@ -13076,7 +13067,43 @@
                 </a:solidFill>
                 <a:latin typeface="Calibri"/>
               </a:rPr>
-              <a:t> en el cuerpo del texto, y ninguna afirmación fuerte quedó sin respaldo.</a:t>
+              <a:t> suba `S05_PlanteamientoMarco_Apellido` (Google Doc o PDF) como </a:t>
+            </a:r>
+            <a:r>
+              <a:rPr sz="1600" b="1" i="0">
+                <a:solidFill>
+                  <a:srgbClr val="2B2B2B"/>
+                </a:solidFill>
+                <a:latin typeface="Calibri"/>
+              </a:rPr>
+              <a:t>ACA Final</a:t>
+            </a:r>
+            <a:r>
+              <a:rPr sz="1600" b="0" i="0">
+                <a:solidFill>
+                  <a:srgbClr val="2B2B2B"/>
+                </a:solidFill>
+                <a:latin typeface="Calibri"/>
+              </a:rPr>
+              <a:t> —tarea, 32,8%— en </a:t>
+            </a:r>
+            <a:r>
+              <a:rPr sz="1600" b="1" i="0">
+                <a:solidFill>
+                  <a:srgbClr val="2B2B2B"/>
+                </a:solidFill>
+                <a:latin typeface="Calibri"/>
+              </a:rPr>
+              <a:t>CDigital</a:t>
+            </a:r>
+            <a:r>
+              <a:rPr sz="1600" b="0" i="0">
+                <a:solidFill>
+                  <a:srgbClr val="2B2B2B"/>
+                </a:solidFill>
+                <a:latin typeface="Calibri"/>
+              </a:rPr>
+              <a:t>.</a:t>
             </a:r>
           </a:p>
           <a:p>
@@ -13092,7 +13119,7 @@
                 </a:solidFill>
                 <a:latin typeface="Calibri"/>
               </a:rPr>
-              <a:t>–   [ ] Prioricé </a:t>
+              <a:t>–   </a:t>
             </a:r>
             <a:r>
               <a:rPr sz="1600" b="1" i="0">
@@ -13101,7 +13128,7 @@
                 </a:solidFill>
                 <a:latin typeface="Calibri"/>
               </a:rPr>
-              <a:t>2 o 3 causas</a:t>
+              <a:t>Verifique el estado:</a:t>
             </a:r>
             <a:r>
               <a:rPr sz="1600" b="0" i="0">
@@ -13110,256 +13137,14 @@
                 </a:solidFill>
                 <a:latin typeface="Calibri"/>
               </a:rPr>
-              <a:t>, no diez enunciadas al paso, y </a:t>
-            </a:r>
-            <a:r>
-              <a:rPr sz="1600" b="1" i="0">
-                <a:solidFill>
-                  <a:srgbClr val="2B2B2B"/>
-                </a:solidFill>
-                <a:latin typeface="Calibri"/>
-              </a:rPr>
-              <a:t>no</a:t>
-            </a:r>
-            <a:r>
-              <a:rPr sz="1600" b="0" i="0">
-                <a:solidFill>
-                  <a:srgbClr val="2B2B2B"/>
-                </a:solidFill>
-                <a:latin typeface="Calibri"/>
-              </a:rPr>
-              <a:t> propongo ninguna solución en este texto.</a:t>
-            </a:r>
-          </a:p>
-          <a:p>
-            <a:pPr>
-              <a:spcAft>
-                <a:spcPts val="1000"/>
-              </a:spcAft>
-            </a:pPr>
-            <a:r>
-              <a:rPr sz="1600" b="0" i="0">
-                <a:solidFill>
-                  <a:srgbClr val="2B2B2B"/>
-                </a:solidFill>
-                <a:latin typeface="Calibri"/>
-              </a:rPr>
-              <a:t>–   [ ] El </a:t>
-            </a:r>
-            <a:r>
-              <a:rPr sz="1600" b="1" i="0">
-                <a:solidFill>
-                  <a:srgbClr val="2B2B2B"/>
-                </a:solidFill>
-                <a:latin typeface="Calibri"/>
-              </a:rPr>
-              <a:t>último párrafo cae en mi pregunta</a:t>
-            </a:r>
-            <a:r>
-              <a:rPr sz="1600" b="0" i="0">
-                <a:solidFill>
-                  <a:srgbClr val="2B2B2B"/>
-                </a:solidFill>
-                <a:latin typeface="Calibri"/>
-              </a:rPr>
-              <a:t>, exactamente la misma de la sesión anterior.</a:t>
-            </a:r>
-          </a:p>
-          <a:p>
-            <a:pPr>
-              <a:spcAft>
-                <a:spcPts val="1000"/>
-              </a:spcAft>
-            </a:pPr>
-            <a:r>
-              <a:rPr sz="1600" b="0" i="0">
-                <a:solidFill>
-                  <a:srgbClr val="2B2B2B"/>
-                </a:solidFill>
-                <a:latin typeface="Calibri"/>
-              </a:rPr>
-              <a:t>–   [ ] Declaré </a:t>
-            </a:r>
-            <a:r>
-              <a:rPr sz="1600" b="1" i="0">
-                <a:solidFill>
-                  <a:srgbClr val="2B2B2B"/>
-                </a:solidFill>
-                <a:latin typeface="Calibri"/>
-              </a:rPr>
-              <a:t>2 o 3 constructos</a:t>
-            </a:r>
-            <a:r>
-              <a:rPr sz="1600" b="0" i="0">
-                <a:solidFill>
-                  <a:srgbClr val="2B2B2B"/>
-                </a:solidFill>
-                <a:latin typeface="Calibri"/>
-              </a:rPr>
-              <a:t> y el marco está organizado con </a:t>
-            </a:r>
-            <a:r>
-              <a:rPr sz="1600" b="1" i="0">
-                <a:solidFill>
-                  <a:srgbClr val="2B2B2B"/>
-                </a:solidFill>
-                <a:latin typeface="Calibri"/>
-              </a:rPr>
-              <a:t>un subtítulo por constructo</a:t>
-            </a:r>
-            <a:r>
-              <a:rPr sz="1600" b="0" i="0">
-                <a:solidFill>
-                  <a:srgbClr val="2B2B2B"/>
-                </a:solidFill>
-                <a:latin typeface="Calibri"/>
-              </a:rPr>
-              <a:t>, no por autores ni por fechas.</a:t>
-            </a:r>
-          </a:p>
-          <a:p>
-            <a:pPr>
-              <a:spcAft>
-                <a:spcPts val="1000"/>
-              </a:spcAft>
-            </a:pPr>
-            <a:r>
-              <a:rPr sz="1600" b="0" i="0">
-                <a:solidFill>
-                  <a:srgbClr val="2B2B2B"/>
-                </a:solidFill>
-                <a:latin typeface="Calibri"/>
-              </a:rPr>
-              <a:t>–   [ ] Tengo </a:t>
-            </a:r>
-            <a:r>
-              <a:rPr sz="1600" b="1" i="0">
-                <a:solidFill>
-                  <a:srgbClr val="2B2B2B"/>
-                </a:solidFill>
-                <a:latin typeface="Calibri"/>
-              </a:rPr>
-              <a:t>5 fuentes</a:t>
-            </a:r>
-            <a:r>
-              <a:rPr sz="1600" b="0" i="0">
-                <a:solidFill>
-                  <a:srgbClr val="2B2B2B"/>
-                </a:solidFill>
-                <a:latin typeface="Calibri"/>
-              </a:rPr>
-              <a:t> con </a:t>
-            </a:r>
-            <a:r>
-              <a:rPr sz="1600" b="1" i="0">
-                <a:solidFill>
-                  <a:srgbClr val="2B2B2B"/>
-                </a:solidFill>
-                <a:latin typeface="Calibri"/>
-              </a:rPr>
-              <a:t>ficha de lectura</a:t>
-            </a:r>
-            <a:r>
-              <a:rPr sz="1600" b="0" i="0">
-                <a:solidFill>
-                  <a:srgbClr val="2B2B2B"/>
-                </a:solidFill>
-                <a:latin typeface="Calibri"/>
-              </a:rPr>
-              <a:t> completa, y el campo </a:t>
-            </a:r>
-            <a:r>
-              <a:rPr sz="1600" b="1" i="0">
-                <a:solidFill>
-                  <a:srgbClr val="2B2B2B"/>
-                </a:solidFill>
-                <a:latin typeface="Calibri"/>
-              </a:rPr>
-              <a:t>"relación con mi pregunta"</a:t>
-            </a:r>
-            <a:r>
-              <a:rPr sz="1600" b="0" i="0">
-                <a:solidFill>
-                  <a:srgbClr val="2B2B2B"/>
-                </a:solidFill>
-                <a:latin typeface="Calibri"/>
-              </a:rPr>
-              <a:t> está lleno en todas.</a:t>
-            </a:r>
-          </a:p>
-          <a:p>
-            <a:pPr>
-              <a:spcAft>
-                <a:spcPts val="1000"/>
-              </a:spcAft>
-            </a:pPr>
-            <a:r>
-              <a:rPr sz="1600" b="0" i="0">
-                <a:solidFill>
-                  <a:srgbClr val="2B2B2B"/>
-                </a:solidFill>
-                <a:latin typeface="Calibri"/>
-              </a:rPr>
-              <a:t>–   [ ] </a:t>
-            </a:r>
-            <a:r>
-              <a:rPr sz="1600" b="1" i="0">
-                <a:solidFill>
-                  <a:srgbClr val="2B2B2B"/>
-                </a:solidFill>
-                <a:latin typeface="Calibri"/>
-              </a:rPr>
-              <a:t>Al menos una</a:t>
-            </a:r>
-            <a:r>
-              <a:rPr sz="1600" b="0" i="0">
-                <a:solidFill>
-                  <a:srgbClr val="2B2B2B"/>
-                </a:solidFill>
-                <a:latin typeface="Calibri"/>
-              </a:rPr>
-              <a:t> fuente es regional (SciELO o Redalyc) y ninguna es blog, video o Wikipedia.</a:t>
-            </a:r>
-          </a:p>
-          <a:p>
-            <a:pPr>
-              <a:spcAft>
-                <a:spcPts val="1000"/>
-              </a:spcAft>
-            </a:pPr>
-            <a:r>
-              <a:rPr sz="1600" b="0" i="0">
-                <a:solidFill>
-                  <a:srgbClr val="2B2B2B"/>
-                </a:solidFill>
-                <a:latin typeface="Calibri"/>
-              </a:rPr>
-              <a:t>–   [ ] Cada párrafo del marco </a:t>
-            </a:r>
-            <a:r>
-              <a:rPr sz="1600" b="1" i="0">
-                <a:solidFill>
-                  <a:srgbClr val="2B2B2B"/>
-                </a:solidFill>
-                <a:latin typeface="Calibri"/>
-              </a:rPr>
-              <a:t>vuelve a mi caso</a:t>
-            </a:r>
-            <a:r>
-              <a:rPr sz="1600" b="0" i="0">
-                <a:solidFill>
-                  <a:srgbClr val="2B2B2B"/>
-                </a:solidFill>
-                <a:latin typeface="Calibri"/>
-              </a:rPr>
-              <a:t> en su última frase.</a:t>
-            </a:r>
-          </a:p>
-        </p:txBody>
-      </p:sp>
-      <p:sp>
-        <p:nvSpPr>
-          <p:cNvPr id="5" name="TextBox 4"/>
+              <a:t> *subido* no es lo mismo que *entregado*. Lo que no esté en el aula, no está entregado.</a:t>
+            </a:r>
+          </a:p>
+        </p:txBody>
+      </p:sp>
+      <p:sp>
+        <p:nvSpPr>
+          <p:cNvPr id="6" name="TextBox 5"/>
           <p:cNvSpPr txBox="1"/>
           <p:nvPr/>
         </p:nvSpPr>
@@ -13492,7 +13277,7 @@
                 </a:solidFill>
                 <a:latin typeface="Calibri"/>
               </a:rPr>
-              <a:t>Checklist antes de subir su entrega (cont.)</a:t>
+              <a:t>Checklist antes de subir su entrega</a:t>
             </a:r>
           </a:p>
         </p:txBody>
@@ -13531,25 +13316,7 @@
                 </a:solidFill>
                 <a:latin typeface="Calibri"/>
               </a:rPr>
-              <a:t>–   [ ] Uso </a:t>
-            </a:r>
-            <a:r>
-              <a:rPr sz="1600" b="1" i="0">
-                <a:solidFill>
-                  <a:srgbClr val="2B2B2B"/>
-                </a:solidFill>
-                <a:latin typeface="Calibri"/>
-              </a:rPr>
-              <a:t>el mismo vocabulario</a:t>
-            </a:r>
-            <a:r>
-              <a:rPr sz="1600" b="0" i="0">
-                <a:solidFill>
-                  <a:srgbClr val="2B2B2B"/>
-                </a:solidFill>
-                <a:latin typeface="Calibri"/>
-              </a:rPr>
-              <a:t> en el planteamiento y en el marco (no "caídas" en uno e "interrupciones" en el otro).</a:t>
+              <a:t>–   [ ] El documento se llama `S05_PlanteamientoMarco_Apellido`.</a:t>
             </a:r>
           </a:p>
           <a:p>
@@ -13565,7 +13332,7 @@
                 </a:solidFill>
                 <a:latin typeface="Calibri"/>
               </a:rPr>
-              <a:t>–   [ ] Todo lo citado en el texto aparece en Referencias, y viceversa, en </a:t>
+              <a:t>–   [ ] Están los </a:t>
             </a:r>
             <a:r>
               <a:rPr sz="1600" b="1" i="0">
@@ -13574,7 +13341,7 @@
                 </a:solidFill>
                 <a:latin typeface="Calibri"/>
               </a:rPr>
-              <a:t>APA 7</a:t>
+              <a:t>seis componentes</a:t>
             </a:r>
             <a:r>
               <a:rPr sz="1600" b="0" i="0">
@@ -13583,7 +13350,43 @@
                 </a:solidFill>
                 <a:latin typeface="Calibri"/>
               </a:rPr>
-              <a:t> revisado a mano.</a:t>
+              <a:t> del planteamiento, </a:t>
+            </a:r>
+            <a:r>
+              <a:rPr sz="1600" b="1" i="0">
+                <a:solidFill>
+                  <a:srgbClr val="2B2B2B"/>
+                </a:solidFill>
+                <a:latin typeface="Calibri"/>
+              </a:rPr>
+              <a:t>en orden</a:t>
+            </a:r>
+            <a:r>
+              <a:rPr sz="1600" b="0" i="0">
+                <a:solidFill>
+                  <a:srgbClr val="2B2B2B"/>
+                </a:solidFill>
+                <a:latin typeface="Calibri"/>
+              </a:rPr>
+              <a:t>, y está escrito en </a:t>
+            </a:r>
+            <a:r>
+              <a:rPr sz="1600" b="1" i="0">
+                <a:solidFill>
+                  <a:srgbClr val="2B2B2B"/>
+                </a:solidFill>
+                <a:latin typeface="Calibri"/>
+              </a:rPr>
+              <a:t>prosa</a:t>
+            </a:r>
+            <a:r>
+              <a:rPr sz="1600" b="0" i="0">
+                <a:solidFill>
+                  <a:srgbClr val="2B2B2B"/>
+                </a:solidFill>
+                <a:latin typeface="Calibri"/>
+              </a:rPr>
+              <a:t> (1 a 1.5 páginas).</a:t>
             </a:r>
           </a:p>
           <a:p>
@@ -13599,7 +13402,7 @@
                 </a:solidFill>
                 <a:latin typeface="Calibri"/>
               </a:rPr>
-              <a:t>–   [ ] Subí el archivo a </a:t>
+              <a:t>–   [ ] Tiene </a:t>
             </a:r>
             <a:r>
               <a:rPr sz="1600" b="1" i="0">
@@ -13608,7 +13411,7 @@
                 </a:solidFill>
                 <a:latin typeface="Calibri"/>
               </a:rPr>
-              <a:t>CDigital</a:t>
+              <a:t>al menos un dato con fuente citada</a:t>
             </a:r>
             <a:r>
               <a:rPr sz="1600" b="0" i="0">
@@ -13617,7 +13420,283 @@
                 </a:solidFill>
                 <a:latin typeface="Calibri"/>
               </a:rPr>
-              <a:t>: [URL CDigital — campus del curso pendiente]</a:t>
+              <a:t> en el cuerpo del texto, y ninguna afirmación fuerte quedó sin respaldo.</a:t>
+            </a:r>
+          </a:p>
+          <a:p>
+            <a:pPr>
+              <a:spcAft>
+                <a:spcPts val="1000"/>
+              </a:spcAft>
+            </a:pPr>
+            <a:r>
+              <a:rPr sz="1600" b="0" i="0">
+                <a:solidFill>
+                  <a:srgbClr val="2B2B2B"/>
+                </a:solidFill>
+                <a:latin typeface="Calibri"/>
+              </a:rPr>
+              <a:t>–   [ ] Prioricé </a:t>
+            </a:r>
+            <a:r>
+              <a:rPr sz="1600" b="1" i="0">
+                <a:solidFill>
+                  <a:srgbClr val="2B2B2B"/>
+                </a:solidFill>
+                <a:latin typeface="Calibri"/>
+              </a:rPr>
+              <a:t>2 o 3 causas</a:t>
+            </a:r>
+            <a:r>
+              <a:rPr sz="1600" b="0" i="0">
+                <a:solidFill>
+                  <a:srgbClr val="2B2B2B"/>
+                </a:solidFill>
+                <a:latin typeface="Calibri"/>
+              </a:rPr>
+              <a:t>, no diez enunciadas al paso, y </a:t>
+            </a:r>
+            <a:r>
+              <a:rPr sz="1600" b="1" i="0">
+                <a:solidFill>
+                  <a:srgbClr val="2B2B2B"/>
+                </a:solidFill>
+                <a:latin typeface="Calibri"/>
+              </a:rPr>
+              <a:t>no</a:t>
+            </a:r>
+            <a:r>
+              <a:rPr sz="1600" b="0" i="0">
+                <a:solidFill>
+                  <a:srgbClr val="2B2B2B"/>
+                </a:solidFill>
+                <a:latin typeface="Calibri"/>
+              </a:rPr>
+              <a:t> propongo ninguna solución en este texto.</a:t>
+            </a:r>
+          </a:p>
+          <a:p>
+            <a:pPr>
+              <a:spcAft>
+                <a:spcPts val="1000"/>
+              </a:spcAft>
+            </a:pPr>
+            <a:r>
+              <a:rPr sz="1600" b="0" i="0">
+                <a:solidFill>
+                  <a:srgbClr val="2B2B2B"/>
+                </a:solidFill>
+                <a:latin typeface="Calibri"/>
+              </a:rPr>
+              <a:t>–   [ ] El </a:t>
+            </a:r>
+            <a:r>
+              <a:rPr sz="1600" b="1" i="0">
+                <a:solidFill>
+                  <a:srgbClr val="2B2B2B"/>
+                </a:solidFill>
+                <a:latin typeface="Calibri"/>
+              </a:rPr>
+              <a:t>último párrafo cae en mi pregunta</a:t>
+            </a:r>
+            <a:r>
+              <a:rPr sz="1600" b="0" i="0">
+                <a:solidFill>
+                  <a:srgbClr val="2B2B2B"/>
+                </a:solidFill>
+                <a:latin typeface="Calibri"/>
+              </a:rPr>
+              <a:t>, exactamente la misma de la sesión anterior.</a:t>
+            </a:r>
+          </a:p>
+          <a:p>
+            <a:pPr>
+              <a:spcAft>
+                <a:spcPts val="1000"/>
+              </a:spcAft>
+            </a:pPr>
+            <a:r>
+              <a:rPr sz="1600" b="0" i="0">
+                <a:solidFill>
+                  <a:srgbClr val="2B2B2B"/>
+                </a:solidFill>
+                <a:latin typeface="Calibri"/>
+              </a:rPr>
+              <a:t>–   [ ] Declaré </a:t>
+            </a:r>
+            <a:r>
+              <a:rPr sz="1600" b="1" i="0">
+                <a:solidFill>
+                  <a:srgbClr val="2B2B2B"/>
+                </a:solidFill>
+                <a:latin typeface="Calibri"/>
+              </a:rPr>
+              <a:t>2 o 3 constructos</a:t>
+            </a:r>
+            <a:r>
+              <a:rPr sz="1600" b="0" i="0">
+                <a:solidFill>
+                  <a:srgbClr val="2B2B2B"/>
+                </a:solidFill>
+                <a:latin typeface="Calibri"/>
+              </a:rPr>
+              <a:t> y el marco está organizado con </a:t>
+            </a:r>
+            <a:r>
+              <a:rPr sz="1600" b="1" i="0">
+                <a:solidFill>
+                  <a:srgbClr val="2B2B2B"/>
+                </a:solidFill>
+                <a:latin typeface="Calibri"/>
+              </a:rPr>
+              <a:t>un subtítulo por constructo</a:t>
+            </a:r>
+            <a:r>
+              <a:rPr sz="1600" b="0" i="0">
+                <a:solidFill>
+                  <a:srgbClr val="2B2B2B"/>
+                </a:solidFill>
+                <a:latin typeface="Calibri"/>
+              </a:rPr>
+              <a:t>, no por autores ni por fechas.</a:t>
+            </a:r>
+          </a:p>
+          <a:p>
+            <a:pPr>
+              <a:spcAft>
+                <a:spcPts val="1000"/>
+              </a:spcAft>
+            </a:pPr>
+            <a:r>
+              <a:rPr sz="1600" b="0" i="0">
+                <a:solidFill>
+                  <a:srgbClr val="2B2B2B"/>
+                </a:solidFill>
+                <a:latin typeface="Calibri"/>
+              </a:rPr>
+              <a:t>–   [ ] Tengo </a:t>
+            </a:r>
+            <a:r>
+              <a:rPr sz="1600" b="1" i="0">
+                <a:solidFill>
+                  <a:srgbClr val="2B2B2B"/>
+                </a:solidFill>
+                <a:latin typeface="Calibri"/>
+              </a:rPr>
+              <a:t>5 fuentes</a:t>
+            </a:r>
+            <a:r>
+              <a:rPr sz="1600" b="0" i="0">
+                <a:solidFill>
+                  <a:srgbClr val="2B2B2B"/>
+                </a:solidFill>
+                <a:latin typeface="Calibri"/>
+              </a:rPr>
+              <a:t> con </a:t>
+            </a:r>
+            <a:r>
+              <a:rPr sz="1600" b="1" i="0">
+                <a:solidFill>
+                  <a:srgbClr val="2B2B2B"/>
+                </a:solidFill>
+                <a:latin typeface="Calibri"/>
+              </a:rPr>
+              <a:t>ficha de lectura</a:t>
+            </a:r>
+            <a:r>
+              <a:rPr sz="1600" b="0" i="0">
+                <a:solidFill>
+                  <a:srgbClr val="2B2B2B"/>
+                </a:solidFill>
+                <a:latin typeface="Calibri"/>
+              </a:rPr>
+              <a:t> completa, y el campo </a:t>
+            </a:r>
+            <a:r>
+              <a:rPr sz="1600" b="1" i="0">
+                <a:solidFill>
+                  <a:srgbClr val="2B2B2B"/>
+                </a:solidFill>
+                <a:latin typeface="Calibri"/>
+              </a:rPr>
+              <a:t>"relación con mi pregunta"</a:t>
+            </a:r>
+            <a:r>
+              <a:rPr sz="1600" b="0" i="0">
+                <a:solidFill>
+                  <a:srgbClr val="2B2B2B"/>
+                </a:solidFill>
+                <a:latin typeface="Calibri"/>
+              </a:rPr>
+              <a:t> está lleno en todas.</a:t>
+            </a:r>
+          </a:p>
+          <a:p>
+            <a:pPr>
+              <a:spcAft>
+                <a:spcPts val="1000"/>
+              </a:spcAft>
+            </a:pPr>
+            <a:r>
+              <a:rPr sz="1600" b="0" i="0">
+                <a:solidFill>
+                  <a:srgbClr val="2B2B2B"/>
+                </a:solidFill>
+                <a:latin typeface="Calibri"/>
+              </a:rPr>
+              <a:t>–   [ ] </a:t>
+            </a:r>
+            <a:r>
+              <a:rPr sz="1600" b="1" i="0">
+                <a:solidFill>
+                  <a:srgbClr val="2B2B2B"/>
+                </a:solidFill>
+                <a:latin typeface="Calibri"/>
+              </a:rPr>
+              <a:t>Al menos una</a:t>
+            </a:r>
+            <a:r>
+              <a:rPr sz="1600" b="0" i="0">
+                <a:solidFill>
+                  <a:srgbClr val="2B2B2B"/>
+                </a:solidFill>
+                <a:latin typeface="Calibri"/>
+              </a:rPr>
+              <a:t> fuente es regional (SciELO o Redalyc) y ninguna es blog, video o Wikipedia.</a:t>
+            </a:r>
+          </a:p>
+          <a:p>
+            <a:pPr>
+              <a:spcAft>
+                <a:spcPts val="1000"/>
+              </a:spcAft>
+            </a:pPr>
+            <a:r>
+              <a:rPr sz="1600" b="0" i="0">
+                <a:solidFill>
+                  <a:srgbClr val="2B2B2B"/>
+                </a:solidFill>
+                <a:latin typeface="Calibri"/>
+              </a:rPr>
+              <a:t>–   [ ] Cada párrafo del marco </a:t>
+            </a:r>
+            <a:r>
+              <a:rPr sz="1600" b="1" i="0">
+                <a:solidFill>
+                  <a:srgbClr val="2B2B2B"/>
+                </a:solidFill>
+                <a:latin typeface="Calibri"/>
+              </a:rPr>
+              <a:t>vuelve a mi caso</a:t>
+            </a:r>
+            <a:r>
+              <a:rPr sz="1600" b="0" i="0">
+                <a:solidFill>
+                  <a:srgbClr val="2B2B2B"/>
+                </a:solidFill>
+                <a:latin typeface="Calibri"/>
+              </a:rPr>
+              <a:t> en su última frase.</a:t>
             </a:r>
           </a:p>
         </p:txBody>
@@ -13757,7 +13836,7 @@
                 </a:solidFill>
                 <a:latin typeface="Calibri"/>
               </a:rPr>
-              <a:t>Trabajo autónomo · recta final hacia la ACA Final</a:t>
+              <a:t>Checklist antes de subir su entrega (cont.)</a:t>
             </a:r>
           </a:p>
         </p:txBody>
@@ -13796,7 +13875,7 @@
                 </a:solidFill>
                 <a:latin typeface="Calibri"/>
               </a:rPr>
-              <a:t>–   </a:t>
+              <a:t>–   [ ] Uso </a:t>
             </a:r>
             <a:r>
               <a:rPr sz="1600" b="1" i="0">
@@ -13805,7 +13884,7 @@
                 </a:solidFill>
                 <a:latin typeface="Calibri"/>
               </a:rPr>
-              <a:t>Esta semana se cierra la ACA Final</a:t>
+              <a:t>el mismo vocabulario</a:t>
             </a:r>
             <a:r>
               <a:rPr sz="1600" b="0" i="0">
@@ -13814,43 +13893,7 @@
                 </a:solidFill>
                 <a:latin typeface="Calibri"/>
               </a:rPr>
-              <a:t> —el artículo consolidado— y también el </a:t>
-            </a:r>
-            <a:r>
-              <a:rPr sz="1600" b="1" i="0">
-                <a:solidFill>
-                  <a:srgbClr val="2B2B2B"/>
-                </a:solidFill>
-                <a:latin typeface="Calibri"/>
-              </a:rPr>
-              <a:t>Quiz 3</a:t>
-            </a:r>
-            <a:r>
-              <a:rPr sz="1600" b="0" i="0">
-                <a:solidFill>
-                  <a:srgbClr val="2B2B2B"/>
-                </a:solidFill>
-                <a:latin typeface="Calibri"/>
-              </a:rPr>
-              <a:t>. Verifique las fechas exactas y el espacio de entrega </a:t>
-            </a:r>
-            <a:r>
-              <a:rPr sz="1600" b="1" i="0">
-                <a:solidFill>
-                  <a:srgbClr val="2B2B2B"/>
-                </a:solidFill>
-                <a:latin typeface="Calibri"/>
-              </a:rPr>
-              <a:t>en CDigital, hoy</a:t>
-            </a:r>
-            <a:r>
-              <a:rPr sz="1600" b="0" i="0">
-                <a:solidFill>
-                  <a:srgbClr val="2B2B2B"/>
-                </a:solidFill>
-                <a:latin typeface="Calibri"/>
-              </a:rPr>
-              <a:t>.</a:t>
+              <a:t> en el planteamiento y en el marco (no "caídas" en uno e "interrupciones" en el otro).</a:t>
             </a:r>
           </a:p>
           <a:p>
@@ -13866,7 +13909,7 @@
                 </a:solidFill>
                 <a:latin typeface="Calibri"/>
               </a:rPr>
-              <a:t>–   </a:t>
+              <a:t>–   [ ] Todo lo citado en el texto aparece en Referencias, y viceversa, en </a:t>
             </a:r>
             <a:r>
               <a:rPr sz="1600" b="1" i="0">
@@ -13875,283 +13918,16 @@
                 </a:solidFill>
                 <a:latin typeface="Calibri"/>
               </a:rPr>
-              <a:t>Qué hay que hacer, en este orden:</a:t>
-            </a:r>
-          </a:p>
-          <a:p>
-            <a:pPr lvl="1">
-              <a:spcAft>
-                <a:spcPts val="600"/>
-              </a:spcAft>
-            </a:pPr>
-            <a:r>
-              <a:rPr sz="1500" b="0" i="0">
-                <a:solidFill>
-                  <a:srgbClr val="2B2B2B"/>
-                </a:solidFill>
-                <a:latin typeface="Calibri"/>
-              </a:rPr>
-              <a:t>●   </a:t>
-            </a:r>
-            <a:r>
-              <a:rPr sz="1500" b="1" i="0">
-                <a:solidFill>
-                  <a:srgbClr val="2B2B2B"/>
-                </a:solidFill>
-                <a:latin typeface="Calibri"/>
-              </a:rPr>
-              <a:t>1.</a:t>
-            </a:r>
-            <a:r>
-              <a:rPr sz="1500" b="0" i="0">
-                <a:solidFill>
-                  <a:srgbClr val="2B2B2B"/>
-                </a:solidFill>
-                <a:latin typeface="Calibri"/>
-              </a:rPr>
-              <a:t> Pegue en un solo documento lo que ya existe: título e introducción · línea de Ingeniería · problema y pregunta · planteamiento · marco por constructos · referencias.</a:t>
-            </a:r>
-          </a:p>
-          <a:p>
-            <a:pPr lvl="1">
-              <a:spcAft>
-                <a:spcPts val="600"/>
-              </a:spcAft>
-            </a:pPr>
-            <a:r>
-              <a:rPr sz="1500" b="0" i="0">
-                <a:solidFill>
-                  <a:srgbClr val="2B2B2B"/>
-                </a:solidFill>
-                <a:latin typeface="Calibri"/>
-              </a:rPr>
-              <a:t>●   </a:t>
-            </a:r>
-            <a:r>
-              <a:rPr sz="1500" b="1" i="0">
-                <a:solidFill>
-                  <a:srgbClr val="2B2B2B"/>
-                </a:solidFill>
-                <a:latin typeface="Calibri"/>
-              </a:rPr>
-              <a:t>2.</a:t>
-            </a:r>
-            <a:r>
-              <a:rPr sz="1500" b="0" i="0">
-                <a:solidFill>
-                  <a:srgbClr val="2B2B2B"/>
-                </a:solidFill>
-                <a:latin typeface="Calibri"/>
-              </a:rPr>
-              <a:t> </a:t>
-            </a:r>
-            <a:r>
-              <a:rPr sz="1500" b="1" i="0">
-                <a:solidFill>
-                  <a:srgbClr val="2B2B2B"/>
-                </a:solidFill>
-                <a:latin typeface="Calibri"/>
-              </a:rPr>
-              <a:t>Léalo seguido, en voz alta.</a:t>
-            </a:r>
-            <a:r>
-              <a:rPr sz="1500" b="0" i="0">
-                <a:solidFill>
-                  <a:srgbClr val="2B2B2B"/>
-                </a:solidFill>
-                <a:latin typeface="Calibri"/>
-              </a:rPr>
-              <a:t> Donde se le trabe la lengua, hay una frase mal armada; donde cambie de vocabulario, hay una costura.</a:t>
-            </a:r>
-          </a:p>
-          <a:p>
-            <a:pPr lvl="1">
-              <a:spcAft>
-                <a:spcPts val="600"/>
-              </a:spcAft>
-            </a:pPr>
-            <a:r>
-              <a:rPr sz="1500" b="0" i="0">
-                <a:solidFill>
-                  <a:srgbClr val="2B2B2B"/>
-                </a:solidFill>
-                <a:latin typeface="Calibri"/>
-              </a:rPr>
-              <a:t>●   </a:t>
-            </a:r>
-            <a:r>
-              <a:rPr sz="1500" b="1" i="0">
-                <a:solidFill>
-                  <a:srgbClr val="2B2B2B"/>
-                </a:solidFill>
-                <a:latin typeface="Calibri"/>
-              </a:rPr>
-              <a:t>3.</a:t>
-            </a:r>
-            <a:r>
-              <a:rPr sz="1500" b="0" i="0">
-                <a:solidFill>
-                  <a:srgbClr val="2B2B2B"/>
-                </a:solidFill>
-                <a:latin typeface="Calibri"/>
-              </a:rPr>
-              <a:t> Amplíe de 5 a </a:t>
-            </a:r>
-            <a:r>
-              <a:rPr sz="1500" b="1" i="0">
-                <a:solidFill>
-                  <a:srgbClr val="2B2B2B"/>
-                </a:solidFill>
-                <a:latin typeface="Calibri"/>
-              </a:rPr>
-              <a:t>8 fuentes</a:t>
-            </a:r>
-            <a:r>
-              <a:rPr sz="1500" b="0" i="0">
-                <a:solidFill>
-                  <a:srgbClr val="2B2B2B"/>
-                </a:solidFill>
-                <a:latin typeface="Calibri"/>
-              </a:rPr>
-              <a:t> con su ficha: es la diferencia entre un marco justo y uno sólido.</a:t>
-            </a:r>
-          </a:p>
-          <a:p>
-            <a:pPr lvl="1">
-              <a:spcAft>
-                <a:spcPts val="600"/>
-              </a:spcAft>
-            </a:pPr>
-            <a:r>
-              <a:rPr sz="1500" b="0" i="0">
-                <a:solidFill>
-                  <a:srgbClr val="2B2B2B"/>
-                </a:solidFill>
-                <a:latin typeface="Calibri"/>
-              </a:rPr>
-              <a:t>●   </a:t>
-            </a:r>
-            <a:r>
-              <a:rPr sz="1500" b="1" i="0">
-                <a:solidFill>
-                  <a:srgbClr val="2B2B2B"/>
-                </a:solidFill>
-                <a:latin typeface="Calibri"/>
-              </a:rPr>
-              <a:t>4.</a:t>
-            </a:r>
-            <a:r>
-              <a:rPr sz="1500" b="0" i="0">
-                <a:solidFill>
-                  <a:srgbClr val="2B2B2B"/>
-                </a:solidFill>
-                <a:latin typeface="Calibri"/>
-              </a:rPr>
-              <a:t> Complete la evidencia que le faltó: identifique las afirmaciones sin respaldo y búsqueles fuente.</a:t>
-            </a:r>
-          </a:p>
-          <a:p>
-            <a:pPr lvl="1">
-              <a:spcAft>
-                <a:spcPts val="600"/>
-              </a:spcAft>
-            </a:pPr>
-            <a:r>
-              <a:rPr sz="1500" b="0" i="0">
-                <a:solidFill>
-                  <a:srgbClr val="2B2B2B"/>
-                </a:solidFill>
-                <a:latin typeface="Calibri"/>
-              </a:rPr>
-              <a:t>●   </a:t>
-            </a:r>
-            <a:r>
-              <a:rPr sz="1500" b="1" i="0">
-                <a:solidFill>
-                  <a:srgbClr val="2B2B2B"/>
-                </a:solidFill>
-                <a:latin typeface="Calibri"/>
-              </a:rPr>
-              <a:t>5.</a:t>
-            </a:r>
-            <a:r>
-              <a:rPr sz="1500" b="0" i="0">
-                <a:solidFill>
-                  <a:srgbClr val="2B2B2B"/>
-                </a:solidFill>
-                <a:latin typeface="Calibri"/>
-              </a:rPr>
-              <a:t> Revise que </a:t>
-            </a:r>
-            <a:r>
-              <a:rPr sz="1500" b="1" i="0">
-                <a:solidFill>
-                  <a:srgbClr val="2B2B2B"/>
-                </a:solidFill>
-                <a:latin typeface="Calibri"/>
-              </a:rPr>
-              <a:t>cada cita del texto</a:t>
-            </a:r>
-            <a:r>
-              <a:rPr sz="1500" b="0" i="0">
-                <a:solidFill>
-                  <a:srgbClr val="2B2B2B"/>
-                </a:solidFill>
-                <a:latin typeface="Calibri"/>
-              </a:rPr>
-              <a:t> tenga su referencia y que no sobre ninguna.</a:t>
-            </a:r>
-          </a:p>
-          <a:p>
-            <a:pPr lvl="1">
-              <a:spcAft>
-                <a:spcPts val="600"/>
-              </a:spcAft>
-            </a:pPr>
-            <a:r>
-              <a:rPr sz="1500" b="0" i="0">
-                <a:solidFill>
-                  <a:srgbClr val="2B2B2B"/>
-                </a:solidFill>
-                <a:latin typeface="Calibri"/>
-              </a:rPr>
-              <a:t>●   </a:t>
-            </a:r>
-            <a:r>
-              <a:rPr sz="1500" b="1" i="0">
-                <a:solidFill>
-                  <a:srgbClr val="2B2B2B"/>
-                </a:solidFill>
-                <a:latin typeface="Calibri"/>
-              </a:rPr>
-              <a:t>6.</a:t>
-            </a:r>
-            <a:r>
-              <a:rPr sz="1500" b="0" i="0">
-                <a:solidFill>
-                  <a:srgbClr val="2B2B2B"/>
-                </a:solidFill>
-                <a:latin typeface="Calibri"/>
-              </a:rPr>
-              <a:t> Incorpore la </a:t>
-            </a:r>
-            <a:r>
-              <a:rPr sz="1500" b="1" i="0">
-                <a:solidFill>
-                  <a:srgbClr val="2B2B2B"/>
-                </a:solidFill>
-                <a:latin typeface="Calibri"/>
-              </a:rPr>
-              <a:t>retroalimentación</a:t>
-            </a:r>
-            <a:r>
-              <a:rPr sz="1500" b="0" i="0">
-                <a:solidFill>
-                  <a:srgbClr val="2B2B2B"/>
-                </a:solidFill>
-                <a:latin typeface="Calibri"/>
-              </a:rPr>
-              <a:t> de los cortes anteriores: eso se evalúa.</a:t>
+              <a:t>APA 7</a:t>
+            </a:r>
+            <a:r>
+              <a:rPr sz="1600" b="0" i="0">
+                <a:solidFill>
+                  <a:srgbClr val="2B2B2B"/>
+                </a:solidFill>
+                <a:latin typeface="Calibri"/>
+              </a:rPr>
+              <a:t> revisado a mano.</a:t>
             </a:r>
           </a:p>
           <a:p>
@@ -14167,7 +13943,7 @@
                 </a:solidFill>
                 <a:latin typeface="Calibri"/>
               </a:rPr>
-              <a:t>–   </a:t>
+              <a:t>–   [ ] Subí el archivo a </a:t>
             </a:r>
             <a:r>
               <a:rPr sz="1600" b="1" i="0">
@@ -14176,7 +13952,7 @@
                 </a:solidFill>
                 <a:latin typeface="Calibri"/>
               </a:rPr>
-              <a:t>No deje la consolidación para la última noche.</a:t>
+              <a:t>CDigital</a:t>
             </a:r>
             <a:r>
               <a:rPr sz="1600" b="0" i="0">
@@ -14185,7 +13961,7 @@
                 </a:solidFill>
                 <a:latin typeface="Calibri"/>
               </a:rPr>
-              <a:t> Cerrado el espacio, no hay archivo que lo reemplace.</a:t>
+              <a:t>: https://cdigital.cun.edu.co/course/view.php?id=111070</a:t>
             </a:r>
           </a:p>
         </p:txBody>
@@ -14325,7 +14101,7 @@
                 </a:solidFill>
                 <a:latin typeface="Calibri"/>
               </a:rPr>
-              <a:t>Trabajo autónomo · recta final hacia la ACA Final (cont.)</a:t>
+              <a:t>Trabajo autónomo · recta final hacia la ACA Final</a:t>
             </a:r>
           </a:p>
         </p:txBody>
@@ -14373,7 +14149,7 @@
                 </a:solidFill>
                 <a:latin typeface="Calibri"/>
               </a:rPr>
-              <a:t>La próxima sesión no tiene entrega nueva:</a:t>
+              <a:t>Esta semana se cierra la ACA Final</a:t>
             </a:r>
             <a:r>
               <a:rPr sz="1600" b="0" i="0">
@@ -14382,7 +14158,7 @@
                 </a:solidFill>
                 <a:latin typeface="Calibri"/>
               </a:rPr>
-              <a:t> es la </a:t>
+              <a:t> —el artículo consolidado— y también el </a:t>
             </a:r>
             <a:r>
               <a:rPr sz="1600" b="1" i="0">
@@ -14391,7 +14167,7 @@
                 </a:solidFill>
                 <a:latin typeface="Calibri"/>
               </a:rPr>
-              <a:t>socialización del artículo y el cierre del curso</a:t>
+              <a:t>Quiz 3</a:t>
             </a:r>
             <a:r>
               <a:rPr sz="1600" b="0" i="0">
@@ -14400,7 +14176,25 @@
                 </a:solidFill>
                 <a:latin typeface="Calibri"/>
               </a:rPr>
-              <a:t>. Prepárese para contar su trabajo en cuatro minutos.</a:t>
+              <a:t>. Verifique las fechas exactas y el espacio de entrega </a:t>
+            </a:r>
+            <a:r>
+              <a:rPr sz="1600" b="1" i="0">
+                <a:solidFill>
+                  <a:srgbClr val="2B2B2B"/>
+                </a:solidFill>
+                <a:latin typeface="Calibri"/>
+              </a:rPr>
+              <a:t>en CDigital, hoy</a:t>
+            </a:r>
+            <a:r>
+              <a:rPr sz="1600" b="0" i="0">
+                <a:solidFill>
+                  <a:srgbClr val="2B2B2B"/>
+                </a:solidFill>
+                <a:latin typeface="Calibri"/>
+              </a:rPr>
+              <a:t>.</a:t>
             </a:r>
           </a:p>
           <a:p>
@@ -14416,7 +14210,7 @@
                 </a:solidFill>
                 <a:latin typeface="Calibri"/>
               </a:rPr>
-              <a:t>–   Entrega y materiales en </a:t>
+              <a:t>–   </a:t>
             </a:r>
             <a:r>
               <a:rPr sz="1600" b="1" i="0">
@@ -14425,8 +14219,291 @@
                 </a:solidFill>
                 <a:latin typeface="Calibri"/>
               </a:rPr>
-              <a:t>CDigital</a:t>
-            </a:r>
+              <a:t>Qué hay que hacer, en este orden:</a:t>
+            </a:r>
+          </a:p>
+          <a:p>
+            <a:pPr lvl="1">
+              <a:spcAft>
+                <a:spcPts val="600"/>
+              </a:spcAft>
+            </a:pPr>
+            <a:r>
+              <a:rPr sz="1500" b="0" i="0">
+                <a:solidFill>
+                  <a:srgbClr val="2B2B2B"/>
+                </a:solidFill>
+                <a:latin typeface="Calibri"/>
+              </a:rPr>
+              <a:t>●   </a:t>
+            </a:r>
+            <a:r>
+              <a:rPr sz="1500" b="1" i="0">
+                <a:solidFill>
+                  <a:srgbClr val="2B2B2B"/>
+                </a:solidFill>
+                <a:latin typeface="Calibri"/>
+              </a:rPr>
+              <a:t>1.</a:t>
+            </a:r>
+            <a:r>
+              <a:rPr sz="1500" b="0" i="0">
+                <a:solidFill>
+                  <a:srgbClr val="2B2B2B"/>
+                </a:solidFill>
+                <a:latin typeface="Calibri"/>
+              </a:rPr>
+              <a:t> Pegue en un solo documento lo que ya existe: título e introducción · línea de Ingeniería · problema y pregunta · planteamiento · marco por constructos · referencias.</a:t>
+            </a:r>
+          </a:p>
+          <a:p>
+            <a:pPr lvl="1">
+              <a:spcAft>
+                <a:spcPts val="600"/>
+              </a:spcAft>
+            </a:pPr>
+            <a:r>
+              <a:rPr sz="1500" b="0" i="0">
+                <a:solidFill>
+                  <a:srgbClr val="2B2B2B"/>
+                </a:solidFill>
+                <a:latin typeface="Calibri"/>
+              </a:rPr>
+              <a:t>●   </a:t>
+            </a:r>
+            <a:r>
+              <a:rPr sz="1500" b="1" i="0">
+                <a:solidFill>
+                  <a:srgbClr val="2B2B2B"/>
+                </a:solidFill>
+                <a:latin typeface="Calibri"/>
+              </a:rPr>
+              <a:t>2.</a:t>
+            </a:r>
+            <a:r>
+              <a:rPr sz="1500" b="0" i="0">
+                <a:solidFill>
+                  <a:srgbClr val="2B2B2B"/>
+                </a:solidFill>
+                <a:latin typeface="Calibri"/>
+              </a:rPr>
+              <a:t> </a:t>
+            </a:r>
+            <a:r>
+              <a:rPr sz="1500" b="1" i="0">
+                <a:solidFill>
+                  <a:srgbClr val="2B2B2B"/>
+                </a:solidFill>
+                <a:latin typeface="Calibri"/>
+              </a:rPr>
+              <a:t>Léalo seguido, en voz alta.</a:t>
+            </a:r>
+            <a:r>
+              <a:rPr sz="1500" b="0" i="0">
+                <a:solidFill>
+                  <a:srgbClr val="2B2B2B"/>
+                </a:solidFill>
+                <a:latin typeface="Calibri"/>
+              </a:rPr>
+              <a:t> Donde se le trabe la lengua, hay una frase mal armada; donde cambie de vocabulario, hay una costura.</a:t>
+            </a:r>
+          </a:p>
+          <a:p>
+            <a:pPr lvl="1">
+              <a:spcAft>
+                <a:spcPts val="600"/>
+              </a:spcAft>
+            </a:pPr>
+            <a:r>
+              <a:rPr sz="1500" b="0" i="0">
+                <a:solidFill>
+                  <a:srgbClr val="2B2B2B"/>
+                </a:solidFill>
+                <a:latin typeface="Calibri"/>
+              </a:rPr>
+              <a:t>●   </a:t>
+            </a:r>
+            <a:r>
+              <a:rPr sz="1500" b="1" i="0">
+                <a:solidFill>
+                  <a:srgbClr val="2B2B2B"/>
+                </a:solidFill>
+                <a:latin typeface="Calibri"/>
+              </a:rPr>
+              <a:t>3.</a:t>
+            </a:r>
+            <a:r>
+              <a:rPr sz="1500" b="0" i="0">
+                <a:solidFill>
+                  <a:srgbClr val="2B2B2B"/>
+                </a:solidFill>
+                <a:latin typeface="Calibri"/>
+              </a:rPr>
+              <a:t> Amplíe de 5 a </a:t>
+            </a:r>
+            <a:r>
+              <a:rPr sz="1500" b="1" i="0">
+                <a:solidFill>
+                  <a:srgbClr val="2B2B2B"/>
+                </a:solidFill>
+                <a:latin typeface="Calibri"/>
+              </a:rPr>
+              <a:t>8 fuentes</a:t>
+            </a:r>
+            <a:r>
+              <a:rPr sz="1500" b="0" i="0">
+                <a:solidFill>
+                  <a:srgbClr val="2B2B2B"/>
+                </a:solidFill>
+                <a:latin typeface="Calibri"/>
+              </a:rPr>
+              <a:t> con su ficha: es la diferencia entre un marco justo y uno sólido.</a:t>
+            </a:r>
+          </a:p>
+          <a:p>
+            <a:pPr lvl="1">
+              <a:spcAft>
+                <a:spcPts val="600"/>
+              </a:spcAft>
+            </a:pPr>
+            <a:r>
+              <a:rPr sz="1500" b="0" i="0">
+                <a:solidFill>
+                  <a:srgbClr val="2B2B2B"/>
+                </a:solidFill>
+                <a:latin typeface="Calibri"/>
+              </a:rPr>
+              <a:t>●   </a:t>
+            </a:r>
+            <a:r>
+              <a:rPr sz="1500" b="1" i="0">
+                <a:solidFill>
+                  <a:srgbClr val="2B2B2B"/>
+                </a:solidFill>
+                <a:latin typeface="Calibri"/>
+              </a:rPr>
+              <a:t>4.</a:t>
+            </a:r>
+            <a:r>
+              <a:rPr sz="1500" b="0" i="0">
+                <a:solidFill>
+                  <a:srgbClr val="2B2B2B"/>
+                </a:solidFill>
+                <a:latin typeface="Calibri"/>
+              </a:rPr>
+              <a:t> Complete la evidencia que le faltó: identifique las afirmaciones sin respaldo y búsqueles fuente.</a:t>
+            </a:r>
+          </a:p>
+          <a:p>
+            <a:pPr lvl="1">
+              <a:spcAft>
+                <a:spcPts val="600"/>
+              </a:spcAft>
+            </a:pPr>
+            <a:r>
+              <a:rPr sz="1500" b="0" i="0">
+                <a:solidFill>
+                  <a:srgbClr val="2B2B2B"/>
+                </a:solidFill>
+                <a:latin typeface="Calibri"/>
+              </a:rPr>
+              <a:t>●   </a:t>
+            </a:r>
+            <a:r>
+              <a:rPr sz="1500" b="1" i="0">
+                <a:solidFill>
+                  <a:srgbClr val="2B2B2B"/>
+                </a:solidFill>
+                <a:latin typeface="Calibri"/>
+              </a:rPr>
+              <a:t>5.</a:t>
+            </a:r>
+            <a:r>
+              <a:rPr sz="1500" b="0" i="0">
+                <a:solidFill>
+                  <a:srgbClr val="2B2B2B"/>
+                </a:solidFill>
+                <a:latin typeface="Calibri"/>
+              </a:rPr>
+              <a:t> Revise que </a:t>
+            </a:r>
+            <a:r>
+              <a:rPr sz="1500" b="1" i="0">
+                <a:solidFill>
+                  <a:srgbClr val="2B2B2B"/>
+                </a:solidFill>
+                <a:latin typeface="Calibri"/>
+              </a:rPr>
+              <a:t>cada cita del texto</a:t>
+            </a:r>
+            <a:r>
+              <a:rPr sz="1500" b="0" i="0">
+                <a:solidFill>
+                  <a:srgbClr val="2B2B2B"/>
+                </a:solidFill>
+                <a:latin typeface="Calibri"/>
+              </a:rPr>
+              <a:t> tenga su referencia y que no sobre ninguna.</a:t>
+            </a:r>
+          </a:p>
+          <a:p>
+            <a:pPr lvl="1">
+              <a:spcAft>
+                <a:spcPts val="600"/>
+              </a:spcAft>
+            </a:pPr>
+            <a:r>
+              <a:rPr sz="1500" b="0" i="0">
+                <a:solidFill>
+                  <a:srgbClr val="2B2B2B"/>
+                </a:solidFill>
+                <a:latin typeface="Calibri"/>
+              </a:rPr>
+              <a:t>●   </a:t>
+            </a:r>
+            <a:r>
+              <a:rPr sz="1500" b="1" i="0">
+                <a:solidFill>
+                  <a:srgbClr val="2B2B2B"/>
+                </a:solidFill>
+                <a:latin typeface="Calibri"/>
+              </a:rPr>
+              <a:t>6.</a:t>
+            </a:r>
+            <a:r>
+              <a:rPr sz="1500" b="0" i="0">
+                <a:solidFill>
+                  <a:srgbClr val="2B2B2B"/>
+                </a:solidFill>
+                <a:latin typeface="Calibri"/>
+              </a:rPr>
+              <a:t> Incorpore la </a:t>
+            </a:r>
+            <a:r>
+              <a:rPr sz="1500" b="1" i="0">
+                <a:solidFill>
+                  <a:srgbClr val="2B2B2B"/>
+                </a:solidFill>
+                <a:latin typeface="Calibri"/>
+              </a:rPr>
+              <a:t>retroalimentación</a:t>
+            </a:r>
+            <a:r>
+              <a:rPr sz="1500" b="0" i="0">
+                <a:solidFill>
+                  <a:srgbClr val="2B2B2B"/>
+                </a:solidFill>
+                <a:latin typeface="Calibri"/>
+              </a:rPr>
+              <a:t> de los cortes anteriores: eso se evalúa.</a:t>
+            </a:r>
+          </a:p>
+          <a:p>
+            <a:pPr>
+              <a:spcAft>
+                <a:spcPts val="1000"/>
+              </a:spcAft>
+            </a:pPr>
             <a:r>
               <a:rPr sz="1600" b="0" i="0">
                 <a:solidFill>
@@ -14434,7 +14511,25 @@
                 </a:solidFill>
                 <a:latin typeface="Calibri"/>
               </a:rPr>
-              <a:t>: [URL CDigital — campus del curso pendiente]</a:t>
+              <a:t>–   </a:t>
+            </a:r>
+            <a:r>
+              <a:rPr sz="1600" b="1" i="0">
+                <a:solidFill>
+                  <a:srgbClr val="2B2B2B"/>
+                </a:solidFill>
+                <a:latin typeface="Calibri"/>
+              </a:rPr>
+              <a:t>No deje la consolidación para la última noche.</a:t>
+            </a:r>
+            <a:r>
+              <a:rPr sz="1600" b="0" i="0">
+                <a:solidFill>
+                  <a:srgbClr val="2B2B2B"/>
+                </a:solidFill>
+                <a:latin typeface="Calibri"/>
+              </a:rPr>
+              <a:t> Cerrado el espacio, no hay archivo que lo reemplace.</a:t>
             </a:r>
           </a:p>
         </p:txBody>
@@ -14483,6 +14578,1463 @@
 </file>
 
 <file path=ppt/slides/slide35.xml><?xml version="1.0" encoding="utf-8"?>
+<p:sld xmlns:a="http://schemas.openxmlformats.org/drawingml/2006/main" xmlns:p="http://schemas.openxmlformats.org/presentationml/2006/main" xmlns:r="http://schemas.openxmlformats.org/officeDocument/2006/relationships">
+  <p:cSld>
+    <p:bg>
+      <p:bgPr>
+        <a:solidFill>
+          <a:srgbClr val="FFFFFF"/>
+        </a:solidFill>
+        <a:effectLst/>
+      </p:bgPr>
+    </p:bg>
+    <p:spTree>
+      <p:nvGrpSpPr>
+        <p:cNvPr id="1" name=""/>
+        <p:cNvGrpSpPr/>
+        <p:nvPr/>
+      </p:nvGrpSpPr>
+      <p:grpSpPr/>
+      <p:sp>
+        <p:nvSpPr>
+          <p:cNvPr id="2" name="Rectangle 1"/>
+          <p:cNvSpPr/>
+          <p:nvPr/>
+        </p:nvSpPr>
+        <p:spPr>
+          <a:xfrm>
+            <a:off x="0" y="0"/>
+            <a:ext cx="12191695" cy="1188720"/>
+          </a:xfrm>
+          <a:prstGeom prst="rect">
+            <a:avLst/>
+          </a:prstGeom>
+          <a:solidFill>
+            <a:srgbClr val="0C2340"/>
+          </a:solidFill>
+          <a:ln>
+            <a:noFill/>
+          </a:ln>
+          <a:effectLst/>
+        </p:spPr>
+        <p:style>
+          <a:lnRef idx="1">
+            <a:schemeClr val="accent1"/>
+          </a:lnRef>
+          <a:fillRef idx="3">
+            <a:schemeClr val="accent1"/>
+          </a:fillRef>
+          <a:effectRef idx="2">
+            <a:schemeClr val="accent1"/>
+          </a:effectRef>
+          <a:fontRef idx="minor">
+            <a:schemeClr val="lt1"/>
+          </a:fontRef>
+        </p:style>
+        <p:txBody>
+          <a:bodyPr rtlCol="0" anchor="ctr"/>
+          <a:lstStyle/>
+          <a:p>
+            <a:pPr algn="ctr"/>
+          </a:p>
+        </p:txBody>
+      </p:sp>
+      <p:sp>
+        <p:nvSpPr>
+          <p:cNvPr id="3" name="TextBox 2"/>
+          <p:cNvSpPr txBox="1"/>
+          <p:nvPr/>
+        </p:nvSpPr>
+        <p:spPr>
+          <a:xfrm>
+            <a:off x="640080" y="0"/>
+            <a:ext cx="9082735" cy="1188720"/>
+          </a:xfrm>
+          <a:prstGeom prst="rect">
+            <a:avLst/>
+          </a:prstGeom>
+          <a:noFill/>
+        </p:spPr>
+        <p:txBody>
+          <a:bodyPr wrap="square" anchor="ctr" lIns="0" rIns="0" tIns="0" bIns="0">
+            <a:spAutoFit/>
+          </a:bodyPr>
+          <a:lstStyle/>
+          <a:p>
+            <a:pPr algn="ctr"/>
+            <a:r>
+              <a:rPr sz="2600" b="1" i="0">
+                <a:solidFill>
+                  <a:srgbClr val="FFFFFF"/>
+                </a:solidFill>
+                <a:latin typeface="Calibri"/>
+              </a:rPr>
+              <a:t>Trabajo autónomo · recta final hacia la ACA Final (cont.)</a:t>
+            </a:r>
+          </a:p>
+        </p:txBody>
+      </p:sp>
+      <p:sp>
+        <p:nvSpPr>
+          <p:cNvPr id="4" name="TextBox 3"/>
+          <p:cNvSpPr txBox="1"/>
+          <p:nvPr/>
+        </p:nvSpPr>
+        <p:spPr>
+          <a:xfrm>
+            <a:off x="640080" y="1691639"/>
+            <a:ext cx="10911535" cy="4617720"/>
+          </a:xfrm>
+          <a:prstGeom prst="rect">
+            <a:avLst/>
+          </a:prstGeom>
+          <a:noFill/>
+        </p:spPr>
+        <p:txBody>
+          <a:bodyPr wrap="square" anchor="t" lIns="0" rIns="0" tIns="0" bIns="0">
+            <a:spAutoFit/>
+          </a:bodyPr>
+          <a:lstStyle/>
+          <a:p>
+            <a:pPr>
+              <a:spcAft>
+                <a:spcPts val="1000"/>
+              </a:spcAft>
+            </a:pPr>
+            <a:r>
+              <a:rPr sz="1600" b="0" i="0">
+                <a:solidFill>
+                  <a:srgbClr val="2B2B2B"/>
+                </a:solidFill>
+                <a:latin typeface="Calibri"/>
+              </a:rPr>
+              <a:t>–   </a:t>
+            </a:r>
+            <a:r>
+              <a:rPr sz="1600" b="1" i="0">
+                <a:solidFill>
+                  <a:srgbClr val="2B2B2B"/>
+                </a:solidFill>
+                <a:latin typeface="Calibri"/>
+              </a:rPr>
+              <a:t>La próxima sesión no tiene entrega nueva:</a:t>
+            </a:r>
+            <a:r>
+              <a:rPr sz="1600" b="0" i="0">
+                <a:solidFill>
+                  <a:srgbClr val="2B2B2B"/>
+                </a:solidFill>
+                <a:latin typeface="Calibri"/>
+              </a:rPr>
+              <a:t> es la </a:t>
+            </a:r>
+            <a:r>
+              <a:rPr sz="1600" b="1" i="0">
+                <a:solidFill>
+                  <a:srgbClr val="2B2B2B"/>
+                </a:solidFill>
+                <a:latin typeface="Calibri"/>
+              </a:rPr>
+              <a:t>socialización del artículo y el cierre del curso</a:t>
+            </a:r>
+            <a:r>
+              <a:rPr sz="1600" b="0" i="0">
+                <a:solidFill>
+                  <a:srgbClr val="2B2B2B"/>
+                </a:solidFill>
+                <a:latin typeface="Calibri"/>
+              </a:rPr>
+              <a:t>. Prepárese para contar su trabajo en cuatro minutos.</a:t>
+            </a:r>
+          </a:p>
+          <a:p>
+            <a:pPr>
+              <a:spcAft>
+                <a:spcPts val="1000"/>
+              </a:spcAft>
+            </a:pPr>
+            <a:r>
+              <a:rPr sz="1600" b="0" i="0">
+                <a:solidFill>
+                  <a:srgbClr val="2B2B2B"/>
+                </a:solidFill>
+                <a:latin typeface="Calibri"/>
+              </a:rPr>
+              <a:t>–   Entrega y materiales en </a:t>
+            </a:r>
+            <a:r>
+              <a:rPr sz="1600" b="1" i="0">
+                <a:solidFill>
+                  <a:srgbClr val="2B2B2B"/>
+                </a:solidFill>
+                <a:latin typeface="Calibri"/>
+              </a:rPr>
+              <a:t>CDigital</a:t>
+            </a:r>
+            <a:r>
+              <a:rPr sz="1600" b="0" i="0">
+                <a:solidFill>
+                  <a:srgbClr val="2B2B2B"/>
+                </a:solidFill>
+                <a:latin typeface="Calibri"/>
+              </a:rPr>
+              <a:t>: https://cdigital.cun.edu.co/course/view.php?id=111070</a:t>
+            </a:r>
+          </a:p>
+        </p:txBody>
+      </p:sp>
+      <p:sp>
+        <p:nvSpPr>
+          <p:cNvPr id="5" name="TextBox 4"/>
+          <p:cNvSpPr txBox="1"/>
+          <p:nvPr/>
+        </p:nvSpPr>
+        <p:spPr>
+          <a:xfrm>
+            <a:off x="11094415" y="6446520"/>
+            <a:ext cx="548640" cy="274320"/>
+          </a:xfrm>
+          <a:prstGeom prst="rect">
+            <a:avLst/>
+          </a:prstGeom>
+          <a:noFill/>
+        </p:spPr>
+        <p:txBody>
+          <a:bodyPr wrap="square" anchor="t" lIns="0" rIns="0" tIns="0" bIns="0">
+            <a:spAutoFit/>
+          </a:bodyPr>
+          <a:lstStyle/>
+          <a:p>
+            <a:pPr algn="r"/>
+            <a:r>
+              <a:rPr sz="1000" b="1" i="0">
+                <a:solidFill>
+                  <a:srgbClr val="8F989D"/>
+                </a:solidFill>
+                <a:latin typeface="Calibri"/>
+              </a:rPr>
+              <a:t>35</a:t>
+            </a:r>
+          </a:p>
+        </p:txBody>
+      </p:sp>
+    </p:spTree>
+  </p:cSld>
+  <p:clrMapOvr>
+    <a:masterClrMapping/>
+  </p:clrMapOvr>
+</p:sld>
+</file>
+
+<file path=ppt/slides/slide36.xml><?xml version="1.0" encoding="utf-8"?>
+<p:sld xmlns:a="http://schemas.openxmlformats.org/drawingml/2006/main" xmlns:p="http://schemas.openxmlformats.org/presentationml/2006/main" xmlns:r="http://schemas.openxmlformats.org/officeDocument/2006/relationships">
+  <p:cSld>
+    <p:bg>
+      <p:bgPr>
+        <a:solidFill>
+          <a:srgbClr val="FFFFFF"/>
+        </a:solidFill>
+        <a:effectLst/>
+      </p:bgPr>
+    </p:bg>
+    <p:spTree>
+      <p:nvGrpSpPr>
+        <p:cNvPr id="1" name=""/>
+        <p:cNvGrpSpPr/>
+        <p:nvPr/>
+      </p:nvGrpSpPr>
+      <p:grpSpPr/>
+      <p:sp>
+        <p:nvSpPr>
+          <p:cNvPr id="2" name="Rectangle 1"/>
+          <p:cNvSpPr/>
+          <p:nvPr/>
+        </p:nvSpPr>
+        <p:spPr>
+          <a:xfrm>
+            <a:off x="0" y="0"/>
+            <a:ext cx="12191695" cy="1188720"/>
+          </a:xfrm>
+          <a:prstGeom prst="rect">
+            <a:avLst/>
+          </a:prstGeom>
+          <a:solidFill>
+            <a:srgbClr val="0C2340"/>
+          </a:solidFill>
+          <a:ln>
+            <a:noFill/>
+          </a:ln>
+          <a:effectLst/>
+        </p:spPr>
+        <p:style>
+          <a:lnRef idx="1">
+            <a:schemeClr val="accent1"/>
+          </a:lnRef>
+          <a:fillRef idx="3">
+            <a:schemeClr val="accent1"/>
+          </a:fillRef>
+          <a:effectRef idx="2">
+            <a:schemeClr val="accent1"/>
+          </a:effectRef>
+          <a:fontRef idx="minor">
+            <a:schemeClr val="lt1"/>
+          </a:fontRef>
+        </p:style>
+        <p:txBody>
+          <a:bodyPr rtlCol="0" anchor="ctr"/>
+          <a:lstStyle/>
+          <a:p>
+            <a:pPr algn="ctr"/>
+          </a:p>
+        </p:txBody>
+      </p:sp>
+      <p:sp>
+        <p:nvSpPr>
+          <p:cNvPr id="3" name="TextBox 2"/>
+          <p:cNvSpPr txBox="1"/>
+          <p:nvPr/>
+        </p:nvSpPr>
+        <p:spPr>
+          <a:xfrm>
+            <a:off x="640080" y="0"/>
+            <a:ext cx="9082735" cy="1188720"/>
+          </a:xfrm>
+          <a:prstGeom prst="rect">
+            <a:avLst/>
+          </a:prstGeom>
+          <a:noFill/>
+        </p:spPr>
+        <p:txBody>
+          <a:bodyPr wrap="square" anchor="ctr" lIns="0" rIns="0" tIns="0" bIns="0">
+            <a:spAutoFit/>
+          </a:bodyPr>
+          <a:lstStyle/>
+          <a:p>
+            <a:pPr algn="ctr"/>
+            <a:r>
+              <a:rPr sz="2600" b="1" i="0">
+                <a:solidFill>
+                  <a:srgbClr val="FFFFFF"/>
+                </a:solidFill>
+                <a:latin typeface="Calibri"/>
+              </a:rPr>
+              <a:t>RUTA DE ENTREGABLES DEL CURSO</a:t>
+            </a:r>
+          </a:p>
+        </p:txBody>
+      </p:sp>
+      <p:sp>
+        <p:nvSpPr>
+          <p:cNvPr id="4" name="TextBox 3"/>
+          <p:cNvSpPr txBox="1"/>
+          <p:nvPr/>
+        </p:nvSpPr>
+        <p:spPr>
+          <a:xfrm>
+            <a:off x="640080" y="1280160"/>
+            <a:ext cx="10911535" cy="411480"/>
+          </a:xfrm>
+          <a:prstGeom prst="rect">
+            <a:avLst/>
+          </a:prstGeom>
+          <a:noFill/>
+        </p:spPr>
+        <p:txBody>
+          <a:bodyPr wrap="square" anchor="t" lIns="0" rIns="0" tIns="0" bIns="0">
+            <a:spAutoFit/>
+          </a:bodyPr>
+          <a:lstStyle/>
+          <a:p>
+            <a:pPr algn="ctr"/>
+            <a:r>
+              <a:rPr sz="1500" b="0" i="0">
+                <a:solidFill>
+                  <a:srgbClr val="2B2B2B"/>
+                </a:solidFill>
+                <a:latin typeface="Calibri"/>
+              </a:rPr>
+              <a:t>Sin fechas a propósito: aquí va </a:t>
+            </a:r>
+            <a:r>
+              <a:rPr sz="1500" b="1" i="0">
+                <a:solidFill>
+                  <a:srgbClr val="2B2B2B"/>
+                </a:solidFill>
+                <a:latin typeface="Calibri"/>
+              </a:rPr>
+              <a:t>en qué punto del curso</a:t>
+            </a:r>
+            <a:r>
+              <a:rPr sz="1500" b="0" i="0">
+                <a:solidFill>
+                  <a:srgbClr val="2B2B2B"/>
+                </a:solidFill>
+                <a:latin typeface="Calibri"/>
+              </a:rPr>
+              <a:t> cierra cada ítem · la ventana exacta la fija CDigital</a:t>
+            </a:r>
+          </a:p>
+        </p:txBody>
+      </p:sp>
+      <p:graphicFrame>
+        <p:nvGraphicFramePr>
+          <p:cNvPr id="5" name="Table 4"/>
+          <p:cNvGraphicFramePr>
+            <a:graphicFrameLocks noGrp="1"/>
+          </p:cNvGraphicFramePr>
+          <p:nvPr/>
+        </p:nvGraphicFramePr>
+        <p:xfrm>
+          <a:off x="640080" y="2011679"/>
+          <a:ext cx="10911533" cy="4297680"/>
+        </p:xfrm>
+        <a:graphic>
+          <a:graphicData uri="http://schemas.openxmlformats.org/drawingml/2006/table">
+            <a:tbl>
+              <a:tblPr>
+                <a:tableStyleId>{2D5ABB26-0587-4C30-8999-92F81FD0307C}</a:tableStyleId>
+              </a:tblPr>
+              <a:tblGrid>
+                <a:gridCol w="2659113"/>
+                <a:gridCol w="2659113"/>
+                <a:gridCol w="5593307"/>
+              </a:tblGrid>
+              <a:tr h="477520">
+                <a:tc>
+                  <a:txBody>
+                    <a:bodyPr/>
+                    <a:lstStyle/>
+                    <a:p>
+                      <a:pPr algn="l"/>
+                      <a:r>
+                        <a:rPr sz="1300" b="1" i="0">
+                          <a:solidFill>
+                            <a:srgbClr val="FFFFFF"/>
+                          </a:solidFill>
+                          <a:latin typeface="Calibri"/>
+                        </a:rPr>
+                        <a:t>Cierra en la semana de…</a:t>
+                      </a:r>
+                    </a:p>
+                  </a:txBody>
+                  <a:tcPr anchor="ctr" marL="109728" marR="91440" marT="36576" marB="36576">
+                    <a:solidFill>
+                      <a:srgbClr val="0C2340"/>
+                    </a:solidFill>
+                  </a:tcPr>
+                </a:tc>
+                <a:tc>
+                  <a:txBody>
+                    <a:bodyPr/>
+                    <a:lstStyle/>
+                    <a:p>
+                      <a:pPr algn="l"/>
+                      <a:r>
+                        <a:rPr sz="1300" b="1" i="0">
+                          <a:solidFill>
+                            <a:srgbClr val="FFFFFF"/>
+                          </a:solidFill>
+                          <a:latin typeface="Calibri"/>
+                        </a:rPr>
+                        <a:t>Entregable</a:t>
+                      </a:r>
+                    </a:p>
+                  </a:txBody>
+                  <a:tcPr anchor="ctr" marL="109728" marR="91440" marT="36576" marB="36576">
+                    <a:solidFill>
+                      <a:srgbClr val="0C2340"/>
+                    </a:solidFill>
+                  </a:tcPr>
+                </a:tc>
+                <a:tc>
+                  <a:txBody>
+                    <a:bodyPr/>
+                    <a:lstStyle/>
+                    <a:p>
+                      <a:pPr algn="l"/>
+                      <a:r>
+                        <a:rPr sz="1300" b="1" i="0">
+                          <a:solidFill>
+                            <a:srgbClr val="FFFFFF"/>
+                          </a:solidFill>
+                          <a:latin typeface="Calibri"/>
+                        </a:rPr>
+                        <a:t>Qué debes tener listo</a:t>
+                      </a:r>
+                    </a:p>
+                  </a:txBody>
+                  <a:tcPr anchor="ctr" marL="109728" marR="91440" marT="36576" marB="36576">
+                    <a:solidFill>
+                      <a:srgbClr val="0C2340"/>
+                    </a:solidFill>
+                  </a:tcPr>
+                </a:tc>
+              </a:tr>
+              <a:tr h="477520">
+                <a:tc>
+                  <a:txBody>
+                    <a:bodyPr/>
+                    <a:lstStyle/>
+                    <a:p>
+                      <a:pPr algn="l"/>
+                      <a:r>
+                        <a:rPr sz="1100" b="1" i="0">
+                          <a:solidFill>
+                            <a:srgbClr val="2B2B2B"/>
+                          </a:solidFill>
+                          <a:latin typeface="Calibri"/>
+                        </a:rPr>
+                        <a:t>Sesión 02</a:t>
+                      </a:r>
+                      <a:r>
+                        <a:rPr sz="1100" b="0" i="0">
+                          <a:solidFill>
+                            <a:srgbClr val="2B2B2B"/>
+                          </a:solidFill>
+                          <a:latin typeface="Calibri"/>
+                        </a:rPr>
+                        <a:t> · ya cerró</a:t>
+                      </a:r>
+                    </a:p>
+                  </a:txBody>
+                  <a:tcPr anchor="ctr" marL="109728" marR="91440" marT="36576" marB="36576">
+                    <a:solidFill>
+                      <a:srgbClr val="FFFFFF"/>
+                    </a:solidFill>
+                  </a:tcPr>
+                </a:tc>
+                <a:tc>
+                  <a:txBody>
+                    <a:bodyPr/>
+                    <a:lstStyle/>
+                    <a:p>
+                      <a:pPr algn="l"/>
+                      <a:r>
+                        <a:rPr sz="1100" b="1" i="0">
+                          <a:solidFill>
+                            <a:srgbClr val="2B2B2B"/>
+                          </a:solidFill>
+                          <a:latin typeface="Calibri"/>
+                        </a:rPr>
+                        <a:t>Quiz 1</a:t>
+                      </a:r>
+                      <a:r>
+                        <a:rPr sz="1100" b="0" i="0">
+                          <a:solidFill>
+                            <a:srgbClr val="2B2B2B"/>
+                          </a:solidFill>
+                          <a:latin typeface="Calibri"/>
+                        </a:rPr>
+                        <a:t> · Cuestionario · 6%</a:t>
+                      </a:r>
+                    </a:p>
+                  </a:txBody>
+                  <a:tcPr anchor="ctr" marL="109728" marR="91440" marT="36576" marB="36576">
+                    <a:solidFill>
+                      <a:srgbClr val="FFFFFF"/>
+                    </a:solidFill>
+                  </a:tcPr>
+                </a:tc>
+                <a:tc>
+                  <a:txBody>
+                    <a:bodyPr/>
+                    <a:lstStyle/>
+                    <a:p>
+                      <a:pPr algn="l"/>
+                      <a:r>
+                        <a:rPr sz="1100" b="0" i="0">
+                          <a:solidFill>
+                            <a:srgbClr val="2B2B2B"/>
+                          </a:solidFill>
+                          <a:latin typeface="Calibri"/>
+                        </a:rPr>
+                        <a:t>Ten claras las </a:t>
+                      </a:r>
+                      <a:r>
+                        <a:rPr sz="1100" b="1" i="0">
+                          <a:solidFill>
+                            <a:srgbClr val="2B2B2B"/>
+                          </a:solidFill>
+                          <a:latin typeface="Calibri"/>
+                        </a:rPr>
+                        <a:t>etapas del método</a:t>
+                      </a:r>
+                      <a:r>
+                        <a:rPr sz="1100" b="0" i="0">
+                          <a:solidFill>
+                            <a:srgbClr val="2B2B2B"/>
+                          </a:solidFill>
+                          <a:latin typeface="Calibri"/>
+                        </a:rPr>
+                        <a:t> y qué es un artículo de nuevo conocimiento.</a:t>
+                      </a:r>
+                    </a:p>
+                  </a:txBody>
+                  <a:tcPr anchor="ctr" marL="109728" marR="91440" marT="36576" marB="36576">
+                    <a:solidFill>
+                      <a:srgbClr val="FFFFFF"/>
+                    </a:solidFill>
+                  </a:tcPr>
+                </a:tc>
+              </a:tr>
+              <a:tr h="477520">
+                <a:tc>
+                  <a:txBody>
+                    <a:bodyPr/>
+                    <a:lstStyle/>
+                    <a:p>
+                      <a:pPr algn="l"/>
+                      <a:r>
+                        <a:rPr sz="1100" b="1" i="0">
+                          <a:solidFill>
+                            <a:srgbClr val="2B2B2B"/>
+                          </a:solidFill>
+                          <a:latin typeface="Calibri"/>
+                        </a:rPr>
+                        <a:t>Sesión 03</a:t>
+                      </a:r>
+                      <a:r>
+                        <a:rPr sz="1100" b="0" i="0">
+                          <a:solidFill>
+                            <a:srgbClr val="2B2B2B"/>
+                          </a:solidFill>
+                          <a:latin typeface="Calibri"/>
+                        </a:rPr>
+                        <a:t> · ya cerró</a:t>
+                      </a:r>
+                    </a:p>
+                  </a:txBody>
+                  <a:tcPr anchor="ctr" marL="109728" marR="91440" marT="36576" marB="36576">
+                    <a:solidFill>
+                      <a:srgbClr val="F2F2F2"/>
+                    </a:solidFill>
+                  </a:tcPr>
+                </a:tc>
+                <a:tc>
+                  <a:txBody>
+                    <a:bodyPr/>
+                    <a:lstStyle/>
+                    <a:p>
+                      <a:pPr algn="l"/>
+                      <a:r>
+                        <a:rPr sz="1100" b="1" i="0">
+                          <a:solidFill>
+                            <a:srgbClr val="2B2B2B"/>
+                          </a:solidFill>
+                          <a:latin typeface="Calibri"/>
+                        </a:rPr>
+                        <a:t>Parcial 1</a:t>
+                      </a:r>
+                      <a:r>
+                        <a:rPr sz="1100" b="0" i="0">
+                          <a:solidFill>
+                            <a:srgbClr val="2B2B2B"/>
+                          </a:solidFill>
+                          <a:latin typeface="Calibri"/>
+                        </a:rPr>
+                        <a:t> · Cuestionario · 24%</a:t>
+                      </a:r>
+                    </a:p>
+                  </a:txBody>
+                  <a:tcPr anchor="ctr" marL="109728" marR="91440" marT="36576" marB="36576">
+                    <a:solidFill>
+                      <a:srgbClr val="F2F2F2"/>
+                    </a:solidFill>
+                  </a:tcPr>
+                </a:tc>
+                <a:tc>
+                  <a:txBody>
+                    <a:bodyPr/>
+                    <a:lstStyle/>
+                    <a:p>
+                      <a:pPr algn="l"/>
+                      <a:r>
+                        <a:rPr sz="1100" b="0" i="0">
+                          <a:solidFill>
+                            <a:srgbClr val="2B2B2B"/>
+                          </a:solidFill>
+                          <a:latin typeface="Calibri"/>
+                        </a:rPr>
+                        <a:t>Ten memorizadas las </a:t>
+                      </a:r>
+                      <a:r>
+                        <a:rPr sz="1100" b="1" i="0">
+                          <a:solidFill>
+                            <a:srgbClr val="2B2B2B"/>
+                          </a:solidFill>
+                          <a:latin typeface="Calibri"/>
+                        </a:rPr>
+                        <a:t>6 líneas</a:t>
+                      </a:r>
+                      <a:r>
+                        <a:rPr sz="1100" b="0" i="0">
+                          <a:solidFill>
+                            <a:srgbClr val="2B2B2B"/>
+                          </a:solidFill>
+                          <a:latin typeface="Calibri"/>
+                        </a:rPr>
+                        <a:t> de MinCiencias y en cuál se ubica tu tema, y por qué.</a:t>
+                      </a:r>
+                    </a:p>
+                  </a:txBody>
+                  <a:tcPr anchor="ctr" marL="109728" marR="91440" marT="36576" marB="36576">
+                    <a:solidFill>
+                      <a:srgbClr val="F2F2F2"/>
+                    </a:solidFill>
+                  </a:tcPr>
+                </a:tc>
+              </a:tr>
+              <a:tr h="477520">
+                <a:tc>
+                  <a:txBody>
+                    <a:bodyPr/>
+                    <a:lstStyle/>
+                    <a:p>
+                      <a:pPr algn="l"/>
+                      <a:r>
+                        <a:rPr sz="1100" b="1" i="0">
+                          <a:solidFill>
+                            <a:srgbClr val="2B2B2B"/>
+                          </a:solidFill>
+                          <a:latin typeface="Calibri"/>
+                        </a:rPr>
+                        <a:t>Sesión 04</a:t>
+                      </a:r>
+                      <a:r>
+                        <a:rPr sz="1100" b="0" i="0">
+                          <a:solidFill>
+                            <a:srgbClr val="2B2B2B"/>
+                          </a:solidFill>
+                          <a:latin typeface="Calibri"/>
+                        </a:rPr>
+                        <a:t> · ya cerró</a:t>
+                      </a:r>
+                    </a:p>
+                  </a:txBody>
+                  <a:tcPr anchor="ctr" marL="109728" marR="91440" marT="36576" marB="36576">
+                    <a:solidFill>
+                      <a:srgbClr val="FFFFFF"/>
+                    </a:solidFill>
+                  </a:tcPr>
+                </a:tc>
+                <a:tc>
+                  <a:txBody>
+                    <a:bodyPr/>
+                    <a:lstStyle/>
+                    <a:p>
+                      <a:pPr algn="l"/>
+                      <a:r>
+                        <a:rPr sz="1100" b="1" i="0">
+                          <a:solidFill>
+                            <a:srgbClr val="2B2B2B"/>
+                          </a:solidFill>
+                          <a:latin typeface="Calibri"/>
+                        </a:rPr>
+                        <a:t>Quiz 2</a:t>
+                      </a:r>
+                      <a:r>
+                        <a:rPr sz="1100" b="0" i="0">
+                          <a:solidFill>
+                            <a:srgbClr val="2B2B2B"/>
+                          </a:solidFill>
+                          <a:latin typeface="Calibri"/>
+                        </a:rPr>
+                        <a:t> · Cuestionario · 9%</a:t>
+                      </a:r>
+                    </a:p>
+                  </a:txBody>
+                  <a:tcPr anchor="ctr" marL="109728" marR="91440" marT="36576" marB="36576">
+                    <a:solidFill>
+                      <a:srgbClr val="FFFFFF"/>
+                    </a:solidFill>
+                  </a:tcPr>
+                </a:tc>
+                <a:tc>
+                  <a:txBody>
+                    <a:bodyPr/>
+                    <a:lstStyle/>
+                    <a:p>
+                      <a:pPr algn="l"/>
+                      <a:r>
+                        <a:rPr sz="1100" b="0" i="0">
+                          <a:solidFill>
+                            <a:srgbClr val="2B2B2B"/>
+                          </a:solidFill>
+                          <a:latin typeface="Calibri"/>
+                        </a:rPr>
+                        <a:t>Distingue </a:t>
+                      </a:r>
+                      <a:r>
+                        <a:rPr sz="1100" b="1" i="0">
+                          <a:solidFill>
+                            <a:srgbClr val="2B2B2B"/>
+                          </a:solidFill>
+                          <a:latin typeface="Calibri"/>
+                        </a:rPr>
+                        <a:t>tipos de fuente</a:t>
+                      </a:r>
+                      <a:r>
+                        <a:rPr sz="1100" b="0" i="0">
+                          <a:solidFill>
+                            <a:srgbClr val="2B2B2B"/>
+                          </a:solidFill>
+                          <a:latin typeface="Calibri"/>
+                        </a:rPr>
+                        <a:t> y qué la hace confiable: quién firma, dónde y de cuándo es.</a:t>
+                      </a:r>
+                    </a:p>
+                  </a:txBody>
+                  <a:tcPr anchor="ctr" marL="109728" marR="91440" marT="36576" marB="36576">
+                    <a:solidFill>
+                      <a:srgbClr val="FFFFFF"/>
+                    </a:solidFill>
+                  </a:tcPr>
+                </a:tc>
+              </a:tr>
+              <a:tr h="477520">
+                <a:tc>
+                  <a:txBody>
+                    <a:bodyPr/>
+                    <a:lstStyle/>
+                    <a:p>
+                      <a:pPr algn="l"/>
+                      <a:r>
+                        <a:rPr sz="1100" b="1" i="0">
+                          <a:solidFill>
+                            <a:srgbClr val="2B2B2B"/>
+                          </a:solidFill>
+                          <a:latin typeface="Calibri"/>
+                        </a:rPr>
+                        <a:t>Sesión 05</a:t>
+                      </a:r>
+                      <a:r>
+                        <a:rPr sz="1100" b="0" i="0">
+                          <a:solidFill>
+                            <a:srgbClr val="2B2B2B"/>
+                          </a:solidFill>
+                          <a:latin typeface="Calibri"/>
+                        </a:rPr>
+                        <a:t> · cierra esta semana</a:t>
+                      </a:r>
+                    </a:p>
+                  </a:txBody>
+                  <a:tcPr anchor="ctr" marL="109728" marR="91440" marT="36576" marB="36576">
+                    <a:solidFill>
+                      <a:srgbClr val="F2F2F2"/>
+                    </a:solidFill>
+                  </a:tcPr>
+                </a:tc>
+                <a:tc>
+                  <a:txBody>
+                    <a:bodyPr/>
+                    <a:lstStyle/>
+                    <a:p>
+                      <a:pPr algn="l"/>
+                      <a:r>
+                        <a:rPr sz="1100" b="1" i="0">
+                          <a:solidFill>
+                            <a:srgbClr val="2B2B2B"/>
+                          </a:solidFill>
+                          <a:latin typeface="Calibri"/>
+                        </a:rPr>
+                        <a:t>Parcial 2</a:t>
+                      </a:r>
+                      <a:r>
+                        <a:rPr sz="1100" b="0" i="0">
+                          <a:solidFill>
+                            <a:srgbClr val="2B2B2B"/>
+                          </a:solidFill>
+                          <a:latin typeface="Calibri"/>
+                        </a:rPr>
+                        <a:t> · Cuestionario · 21%</a:t>
+                      </a:r>
+                    </a:p>
+                  </a:txBody>
+                  <a:tcPr anchor="ctr" marL="109728" marR="91440" marT="36576" marB="36576">
+                    <a:solidFill>
+                      <a:srgbClr val="F2F2F2"/>
+                    </a:solidFill>
+                  </a:tcPr>
+                </a:tc>
+                <a:tc>
+                  <a:txBody>
+                    <a:bodyPr/>
+                    <a:lstStyle/>
+                    <a:p>
+                      <a:pPr algn="l"/>
+                      <a:r>
+                        <a:rPr sz="1100" b="0" i="0">
+                          <a:solidFill>
+                            <a:srgbClr val="2B2B2B"/>
+                          </a:solidFill>
+                          <a:latin typeface="Calibri"/>
+                        </a:rPr>
+                        <a:t>Domina problema, pregunta y objetivo, búsqueda con operadores y citas en </a:t>
+                      </a:r>
+                      <a:r>
+                        <a:rPr sz="1100" b="1" i="0">
+                          <a:solidFill>
+                            <a:srgbClr val="2B2B2B"/>
+                          </a:solidFill>
+                          <a:latin typeface="Calibri"/>
+                        </a:rPr>
+                        <a:t>APA 7</a:t>
+                      </a:r>
+                      <a:r>
+                        <a:rPr sz="1100" b="0" i="0">
+                          <a:solidFill>
+                            <a:srgbClr val="2B2B2B"/>
+                          </a:solidFill>
+                          <a:latin typeface="Calibri"/>
+                        </a:rPr>
+                        <a:t>.</a:t>
+                      </a:r>
+                    </a:p>
+                  </a:txBody>
+                  <a:tcPr anchor="ctr" marL="109728" marR="91440" marT="36576" marB="36576">
+                    <a:solidFill>
+                      <a:srgbClr val="F2F2F2"/>
+                    </a:solidFill>
+                  </a:tcPr>
+                </a:tc>
+              </a:tr>
+              <a:tr h="477520">
+                <a:tc>
+                  <a:txBody>
+                    <a:bodyPr/>
+                    <a:lstStyle/>
+                    <a:p>
+                      <a:pPr algn="l"/>
+                      <a:r>
+                        <a:rPr sz="1100" b="1" i="0">
+                          <a:solidFill>
+                            <a:srgbClr val="2B2B2B"/>
+                          </a:solidFill>
+                          <a:latin typeface="Calibri"/>
+                        </a:rPr>
+                        <a:t>Sesión 05</a:t>
+                      </a:r>
+                      <a:r>
+                        <a:rPr sz="1100" b="0" i="0">
+                          <a:solidFill>
+                            <a:srgbClr val="2B2B2B"/>
+                          </a:solidFill>
+                          <a:latin typeface="Calibri"/>
+                        </a:rPr>
+                        <a:t> · cierra esta semana</a:t>
+                      </a:r>
+                    </a:p>
+                  </a:txBody>
+                  <a:tcPr anchor="ctr" marL="109728" marR="91440" marT="36576" marB="36576">
+                    <a:solidFill>
+                      <a:srgbClr val="FFFFFF"/>
+                    </a:solidFill>
+                  </a:tcPr>
+                </a:tc>
+                <a:tc>
+                  <a:txBody>
+                    <a:bodyPr/>
+                    <a:lstStyle/>
+                    <a:p>
+                      <a:pPr algn="l"/>
+                      <a:r>
+                        <a:rPr sz="1100" b="1" i="0">
+                          <a:solidFill>
+                            <a:srgbClr val="2B2B2B"/>
+                          </a:solidFill>
+                          <a:latin typeface="Calibri"/>
+                        </a:rPr>
+                        <a:t>ACA Final</a:t>
+                      </a:r>
+                      <a:r>
+                        <a:rPr sz="1100" b="0" i="0">
+                          <a:solidFill>
+                            <a:srgbClr val="2B2B2B"/>
+                          </a:solidFill>
+                          <a:latin typeface="Calibri"/>
+                        </a:rPr>
+                        <a:t> · Tarea · 32,8%</a:t>
+                      </a:r>
+                    </a:p>
+                  </a:txBody>
+                  <a:tcPr anchor="ctr" marL="109728" marR="91440" marT="36576" marB="36576">
+                    <a:solidFill>
+                      <a:srgbClr val="FFFFFF"/>
+                    </a:solidFill>
+                  </a:tcPr>
+                </a:tc>
+                <a:tc>
+                  <a:txBody>
+                    <a:bodyPr/>
+                    <a:lstStyle/>
+                    <a:p>
+                      <a:pPr algn="l"/>
+                      <a:r>
+                        <a:rPr sz="1100" b="0" i="0">
+                          <a:solidFill>
+                            <a:srgbClr val="2B2B2B"/>
+                          </a:solidFill>
+                          <a:latin typeface="Calibri"/>
+                        </a:rPr>
+                        <a:t>Sube el </a:t>
+                      </a:r>
+                      <a:r>
+                        <a:rPr sz="1100" b="1" i="0">
+                          <a:solidFill>
+                            <a:srgbClr val="2B2B2B"/>
+                          </a:solidFill>
+                          <a:latin typeface="Calibri"/>
+                        </a:rPr>
+                        <a:t>artículo consolidado</a:t>
+                      </a:r>
+                      <a:r>
+                        <a:rPr sz="1100" b="0" i="0">
+                          <a:solidFill>
+                            <a:srgbClr val="2B2B2B"/>
+                          </a:solidFill>
+                          <a:latin typeface="Calibri"/>
+                        </a:rPr>
+                        <a:t>: problema, pregunta, marco, matriz de fuentes y APA 7.</a:t>
+                      </a:r>
+                    </a:p>
+                  </a:txBody>
+                  <a:tcPr anchor="ctr" marL="109728" marR="91440" marT="36576" marB="36576">
+                    <a:solidFill>
+                      <a:srgbClr val="FFFFFF"/>
+                    </a:solidFill>
+                  </a:tcPr>
+                </a:tc>
+              </a:tr>
+              <a:tr h="477520">
+                <a:tc>
+                  <a:txBody>
+                    <a:bodyPr/>
+                    <a:lstStyle/>
+                    <a:p>
+                      <a:pPr algn="l"/>
+                      <a:r>
+                        <a:rPr sz="1100" b="1" i="0">
+                          <a:solidFill>
+                            <a:srgbClr val="2B2B2B"/>
+                          </a:solidFill>
+                          <a:latin typeface="Calibri"/>
+                        </a:rPr>
+                        <a:t>Sesión 05</a:t>
+                      </a:r>
+                      <a:r>
+                        <a:rPr sz="1100" b="0" i="0">
+                          <a:solidFill>
+                            <a:srgbClr val="2B2B2B"/>
+                          </a:solidFill>
+                          <a:latin typeface="Calibri"/>
+                        </a:rPr>
+                        <a:t> · cierra esta semana</a:t>
+                      </a:r>
+                    </a:p>
+                  </a:txBody>
+                  <a:tcPr anchor="ctr" marL="109728" marR="91440" marT="36576" marB="36576">
+                    <a:solidFill>
+                      <a:srgbClr val="F2F2F2"/>
+                    </a:solidFill>
+                  </a:tcPr>
+                </a:tc>
+                <a:tc>
+                  <a:txBody>
+                    <a:bodyPr/>
+                    <a:lstStyle/>
+                    <a:p>
+                      <a:pPr algn="l"/>
+                      <a:r>
+                        <a:rPr sz="1100" b="1" i="0">
+                          <a:solidFill>
+                            <a:srgbClr val="2B2B2B"/>
+                          </a:solidFill>
+                          <a:latin typeface="Calibri"/>
+                        </a:rPr>
+                        <a:t>Quiz 3</a:t>
+                      </a:r>
+                      <a:r>
+                        <a:rPr sz="1100" b="0" i="0">
+                          <a:solidFill>
+                            <a:srgbClr val="2B2B2B"/>
+                          </a:solidFill>
+                          <a:latin typeface="Calibri"/>
+                        </a:rPr>
+                        <a:t> · Cuestionario · 4%</a:t>
+                      </a:r>
+                    </a:p>
+                  </a:txBody>
+                  <a:tcPr anchor="ctr" marL="109728" marR="91440" marT="36576" marB="36576">
+                    <a:solidFill>
+                      <a:srgbClr val="F2F2F2"/>
+                    </a:solidFill>
+                  </a:tcPr>
+                </a:tc>
+                <a:tc>
+                  <a:txBody>
+                    <a:bodyPr/>
+                    <a:lstStyle/>
+                    <a:p>
+                      <a:pPr algn="l"/>
+                      <a:r>
+                        <a:rPr sz="1100" b="0" i="0">
+                          <a:solidFill>
+                            <a:srgbClr val="2B2B2B"/>
+                          </a:solidFill>
+                          <a:latin typeface="Calibri"/>
+                        </a:rPr>
+                        <a:t>Ten claras las partes del </a:t>
+                      </a:r>
+                      <a:r>
+                        <a:rPr sz="1100" b="1" i="0">
+                          <a:solidFill>
+                            <a:srgbClr val="2B2B2B"/>
+                          </a:solidFill>
+                          <a:latin typeface="Calibri"/>
+                        </a:rPr>
+                        <a:t>planteamiento</a:t>
+                      </a:r>
+                      <a:r>
+                        <a:rPr sz="1100" b="0" i="0">
+                          <a:solidFill>
+                            <a:srgbClr val="2B2B2B"/>
+                          </a:solidFill>
+                          <a:latin typeface="Calibri"/>
+                        </a:rPr>
+                        <a:t> y qué es una revisión de literatura articulada.</a:t>
+                      </a:r>
+                    </a:p>
+                  </a:txBody>
+                  <a:tcPr anchor="ctr" marL="109728" marR="91440" marT="36576" marB="36576">
+                    <a:solidFill>
+                      <a:srgbClr val="F2F2F2"/>
+                    </a:solidFill>
+                  </a:tcPr>
+                </a:tc>
+              </a:tr>
+              <a:tr h="477520">
+                <a:tc>
+                  <a:txBody>
+                    <a:bodyPr/>
+                    <a:lstStyle/>
+                    <a:p>
+                      <a:pPr algn="l"/>
+                      <a:r>
+                        <a:rPr sz="1100" b="1" i="0">
+                          <a:solidFill>
+                            <a:srgbClr val="2B2B2B"/>
+                          </a:solidFill>
+                          <a:latin typeface="Calibri"/>
+                        </a:rPr>
+                        <a:t>Sesión 06</a:t>
+                      </a:r>
+                      <a:r>
+                        <a:rPr sz="1100" b="0" i="0">
+                          <a:solidFill>
+                            <a:srgbClr val="2B2B2B"/>
+                          </a:solidFill>
+                          <a:latin typeface="Calibri"/>
+                        </a:rPr>
+                        <a:t> · pendiente</a:t>
+                      </a:r>
+                    </a:p>
+                  </a:txBody>
+                  <a:tcPr anchor="ctr" marL="109728" marR="91440" marT="36576" marB="36576">
+                    <a:solidFill>
+                      <a:srgbClr val="FFFFFF"/>
+                    </a:solidFill>
+                  </a:tcPr>
+                </a:tc>
+                <a:tc>
+                  <a:txBody>
+                    <a:bodyPr/>
+                    <a:lstStyle/>
+                    <a:p>
+                      <a:pPr algn="l"/>
+                      <a:r>
+                        <a:rPr sz="1100" b="1" i="0">
+                          <a:solidFill>
+                            <a:srgbClr val="2B2B2B"/>
+                          </a:solidFill>
+                          <a:latin typeface="Calibri"/>
+                        </a:rPr>
+                        <a:t>Autoevaluación</a:t>
+                      </a:r>
+                      <a:r>
+                        <a:rPr sz="1100" b="0" i="0">
+                          <a:solidFill>
+                            <a:srgbClr val="2B2B2B"/>
+                          </a:solidFill>
+                          <a:latin typeface="Calibri"/>
+                        </a:rPr>
+                        <a:t> · Cuestionario · 1,6%</a:t>
+                      </a:r>
+                    </a:p>
+                  </a:txBody>
+                  <a:tcPr anchor="ctr" marL="109728" marR="91440" marT="36576" marB="36576">
+                    <a:solidFill>
+                      <a:srgbClr val="FFFFFF"/>
+                    </a:solidFill>
+                  </a:tcPr>
+                </a:tc>
+                <a:tc>
+                  <a:txBody>
+                    <a:bodyPr/>
+                    <a:lstStyle/>
+                    <a:p>
+                      <a:pPr algn="l"/>
+                      <a:r>
+                        <a:rPr sz="1100" b="0" i="0">
+                          <a:solidFill>
+                            <a:srgbClr val="2B2B2B"/>
+                          </a:solidFill>
+                          <a:latin typeface="Calibri"/>
+                        </a:rPr>
+                        <a:t>Diligénciala tú, según tu </a:t>
+                      </a:r>
+                      <a:r>
+                        <a:rPr sz="1100" b="1" i="0">
+                          <a:solidFill>
+                            <a:srgbClr val="2B2B2B"/>
+                          </a:solidFill>
+                          <a:latin typeface="Calibri"/>
+                        </a:rPr>
+                        <a:t>participación real</a:t>
+                      </a:r>
+                      <a:r>
+                        <a:rPr sz="1100" b="0" i="0">
+                          <a:solidFill>
+                            <a:srgbClr val="2B2B2B"/>
+                          </a:solidFill>
+                          <a:latin typeface="Calibri"/>
+                        </a:rPr>
+                        <a:t> en el periodo.</a:t>
+                      </a:r>
+                    </a:p>
+                  </a:txBody>
+                  <a:tcPr anchor="ctr" marL="109728" marR="91440" marT="36576" marB="36576">
+                    <a:solidFill>
+                      <a:srgbClr val="FFFFFF"/>
+                    </a:solidFill>
+                  </a:tcPr>
+                </a:tc>
+              </a:tr>
+              <a:tr h="477520">
+                <a:tc>
+                  <a:txBody>
+                    <a:bodyPr/>
+                    <a:lstStyle/>
+                    <a:p>
+                      <a:pPr algn="l"/>
+                      <a:r>
+                        <a:rPr sz="1100" b="1" i="0">
+                          <a:solidFill>
+                            <a:srgbClr val="2B2B2B"/>
+                          </a:solidFill>
+                          <a:latin typeface="Calibri"/>
+                        </a:rPr>
+                        <a:t>Sesión 06</a:t>
+                      </a:r>
+                      <a:r>
+                        <a:rPr sz="1100" b="0" i="0">
+                          <a:solidFill>
+                            <a:srgbClr val="2B2B2B"/>
+                          </a:solidFill>
+                          <a:latin typeface="Calibri"/>
+                        </a:rPr>
+                        <a:t> · pendiente</a:t>
+                      </a:r>
+                    </a:p>
+                  </a:txBody>
+                  <a:tcPr anchor="ctr" marL="109728" marR="91440" marT="36576" marB="36576">
+                    <a:solidFill>
+                      <a:srgbClr val="F2F2F2"/>
+                    </a:solidFill>
+                  </a:tcPr>
+                </a:tc>
+                <a:tc>
+                  <a:txBody>
+                    <a:bodyPr/>
+                    <a:lstStyle/>
+                    <a:p>
+                      <a:pPr algn="l"/>
+                      <a:r>
+                        <a:rPr sz="1100" b="1" i="0">
+                          <a:solidFill>
+                            <a:srgbClr val="2B2B2B"/>
+                          </a:solidFill>
+                          <a:latin typeface="Calibri"/>
+                        </a:rPr>
+                        <a:t>Coevaluación</a:t>
+                      </a:r>
+                      <a:r>
+                        <a:rPr sz="1100" b="0" i="0">
+                          <a:solidFill>
+                            <a:srgbClr val="2B2B2B"/>
+                          </a:solidFill>
+                          <a:latin typeface="Calibri"/>
+                        </a:rPr>
+                        <a:t> · Foro · 1,6%</a:t>
+                      </a:r>
+                    </a:p>
+                  </a:txBody>
+                  <a:tcPr anchor="ctr" marL="109728" marR="91440" marT="36576" marB="36576">
+                    <a:solidFill>
+                      <a:srgbClr val="F2F2F2"/>
+                    </a:solidFill>
+                  </a:tcPr>
+                </a:tc>
+                <a:tc>
+                  <a:txBody>
+                    <a:bodyPr/>
+                    <a:lstStyle/>
+                    <a:p>
+                      <a:pPr algn="l"/>
+                      <a:r>
+                        <a:rPr sz="1100" b="1" i="0">
+                          <a:solidFill>
+                            <a:srgbClr val="2B2B2B"/>
+                          </a:solidFill>
+                          <a:latin typeface="Calibri"/>
+                        </a:rPr>
+                        <a:t>Publica tu aporte</a:t>
+                      </a:r>
+                      <a:r>
+                        <a:rPr sz="1100" b="0" i="0">
+                          <a:solidFill>
+                            <a:srgbClr val="2B2B2B"/>
+                          </a:solidFill>
+                          <a:latin typeface="Calibri"/>
+                        </a:rPr>
+                        <a:t>: valora con respeto hechos del trabajo del equipo, no personas.</a:t>
+                      </a:r>
+                    </a:p>
+                  </a:txBody>
+                  <a:tcPr anchor="ctr" marL="109728" marR="91440" marT="36576" marB="36576">
+                    <a:solidFill>
+                      <a:srgbClr val="F2F2F2"/>
+                    </a:solidFill>
+                  </a:tcPr>
+                </a:tc>
+              </a:tr>
+            </a:tbl>
+          </a:graphicData>
+        </a:graphic>
+      </p:graphicFrame>
+      <p:sp>
+        <p:nvSpPr>
+          <p:cNvPr id="6" name="TextBox 5"/>
+          <p:cNvSpPr txBox="1"/>
+          <p:nvPr/>
+        </p:nvSpPr>
+        <p:spPr>
+          <a:xfrm>
+            <a:off x="640080" y="6080760"/>
+            <a:ext cx="10911535" cy="548640"/>
+          </a:xfrm>
+          <a:prstGeom prst="rect">
+            <a:avLst/>
+          </a:prstGeom>
+          <a:noFill/>
+        </p:spPr>
+        <p:txBody>
+          <a:bodyPr wrap="square" anchor="t" lIns="0" rIns="0" tIns="0" bIns="0">
+            <a:spAutoFit/>
+          </a:bodyPr>
+          <a:lstStyle/>
+          <a:p>
+            <a:r>
+              <a:rPr sz="1200" b="0" i="1">
+                <a:solidFill>
+                  <a:srgbClr val="2B2B2B"/>
+                </a:solidFill>
+                <a:latin typeface="Calibri"/>
+              </a:rPr>
+              <a:t>Esta misma tabla va al final de todas las sesiones. La </a:t>
+            </a:r>
+            <a:r>
+              <a:rPr sz="1200" b="1" i="1">
+                <a:solidFill>
+                  <a:srgbClr val="2B2B2B"/>
+                </a:solidFill>
+                <a:latin typeface="Calibri"/>
+              </a:rPr>
+              <a:t>fecha</a:t>
+            </a:r>
+            <a:r>
+              <a:rPr sz="1200" b="0" i="1">
+                <a:solidFill>
+                  <a:srgbClr val="2B2B2B"/>
+                </a:solidFill>
+                <a:latin typeface="Calibri"/>
+              </a:rPr>
+              <a:t> de cada ventana está en el enunciado del ítem (`Clases/Recursos/ACAs/`) y en el aula: si el aula y cualquier otro material se contradicen, </a:t>
+            </a:r>
+            <a:r>
+              <a:rPr sz="1200" b="1" i="1">
+                <a:solidFill>
+                  <a:srgbClr val="2B2B2B"/>
+                </a:solidFill>
+                <a:latin typeface="Calibri"/>
+              </a:rPr>
+              <a:t>manda el aula</a:t>
+            </a:r>
+            <a:r>
+              <a:rPr sz="1200" b="0" i="1">
+                <a:solidFill>
+                  <a:srgbClr val="2B2B2B"/>
+                </a:solidFill>
+                <a:latin typeface="Calibri"/>
+              </a:rPr>
+              <a:t>.</a:t>
+            </a:r>
+          </a:p>
+        </p:txBody>
+      </p:sp>
+      <p:sp>
+        <p:nvSpPr>
+          <p:cNvPr id="7" name="TextBox 6"/>
+          <p:cNvSpPr txBox="1"/>
+          <p:nvPr/>
+        </p:nvSpPr>
+        <p:spPr>
+          <a:xfrm>
+            <a:off x="11094415" y="6446520"/>
+            <a:ext cx="548640" cy="274320"/>
+          </a:xfrm>
+          <a:prstGeom prst="rect">
+            <a:avLst/>
+          </a:prstGeom>
+          <a:noFill/>
+        </p:spPr>
+        <p:txBody>
+          <a:bodyPr wrap="square" anchor="t" lIns="0" rIns="0" tIns="0" bIns="0">
+            <a:spAutoFit/>
+          </a:bodyPr>
+          <a:lstStyle/>
+          <a:p>
+            <a:pPr algn="r"/>
+            <a:r>
+              <a:rPr sz="1000" b="1" i="0">
+                <a:solidFill>
+                  <a:srgbClr val="8F989D"/>
+                </a:solidFill>
+                <a:latin typeface="Calibri"/>
+              </a:rPr>
+              <a:t>36</a:t>
+            </a:r>
+          </a:p>
+        </p:txBody>
+      </p:sp>
+    </p:spTree>
+  </p:cSld>
+  <p:clrMapOvr>
+    <a:masterClrMapping/>
+  </p:clrMapOvr>
+</p:sld>
+</file>
+
+<file path=ppt/slides/slide37.xml><?xml version="1.0" encoding="utf-8"?>
 <p:sld xmlns:a="http://schemas.openxmlformats.org/drawingml/2006/main" xmlns:p="http://schemas.openxmlformats.org/presentationml/2006/main" xmlns:r="http://schemas.openxmlformats.org/officeDocument/2006/relationships">
   <p:cSld>
     <p:bg>
